--- a/presentation/CyberScope-editable-static.pptx
+++ b/presentation/CyberScope-editable-static.pptx
@@ -11,6 +11,7 @@
     <p:sldId id="256" r:id="rId2"/>
     <p:sldId id="257" r:id="rId3"/>
     <p:sldId id="258" r:id="rId4"/>
+    <p:sldId id="266" r:id="rId101"/>
     <p:sldId id="259" r:id="rId5"/>
     <p:sldId id="260" r:id="rId6"/>
     <p:sldId id="261" r:id="rId7"/>
@@ -93,6 +94,58 @@
                 <a:latin typeface="Space Grotesk"/>
               </a:rPr>
               <a:t>We're the CyberScope team. We're investigating how changes to an IoT device affect trust in its sensor data. Our approach is to compare an integrity map of the device's current state with an approved baseline.</a:t>
+            </a:r>
+          </a:p>
+        </p:txBody>
+      </p:sp>
+    </p:spTree>
+  </p:cSld>
+  <p:clrMapOvr>
+    <a:masterClrMapping/>
+  </p:clrMapOvr>
+</p:notes>
+</file>
+
+<file path=ppt/notesSlides/notesSlide11.xml><?xml version="1.0" encoding="utf-8"?>
+<p:notes xmlns:a="http://schemas.openxmlformats.org/drawingml/2006/main" xmlns:p="http://schemas.openxmlformats.org/presentationml/2006/main">
+  <p:cSld>
+    <p:spTree>
+      <p:nvGrpSpPr>
+        <p:cNvPr id="1" name="Slide objects"/>
+        <p:cNvGrpSpPr/>
+        <p:nvPr/>
+      </p:nvGrpSpPr>
+      <p:grpSpPr>
+        <a:xfrm>
+          <a:off x="0" y="0"/>
+          <a:ext cx="0" cy="0"/>
+          <a:chOff x="0" y="0"/>
+          <a:chExt cx="0" cy="0"/>
+        </a:xfrm>
+      </p:grpSpPr>
+      <p:sp>
+        <p:nvSpPr>
+          <p:cNvPr id="2" name="USB scenario speaker notes"/>
+          <p:cNvSpPr txBox="1"/>
+          <p:nvPr>
+            <p:ph type="body" idx="1"/>
+          </p:nvPr>
+        </p:nvSpPr>
+        <p:spPr>
+          <a:xfrm>
+            <a:off x="304800" y="3048000"/>
+            <a:ext cx="5029200" cy="3810000"/>
+          </a:xfrm>
+        </p:spPr>
+        <p:txBody>
+          <a:bodyPr/>
+          <a:lstStyle/>
+          <a:p>
+            <a:r>
+              <a:rPr lang="en-AU" sz="1200">
+                <a:latin typeface="Space Grotesk"/>
+              </a:rPr>
+              <a:t>Scenario 2: Reject and restore. Connecting an unauthorised USB device changes a monitored parameter, so the Pi generates and submits a changed runtime I2Map. The verifier compares that runtime digest with the unchanged trusted baseline, detects the mismatch, rejects sensor data and alerts the administrator. The administrator restores the approved configuration and the device is checked again; a matching digest allows data to be accepted again. This is a static illustration of the proposed architecture, not live traffic or measured hash values.</a:t>
             </a:r>
           </a:p>
         </p:txBody>
@@ -1335,6 +1388,4520 @@
     <a:masterClrMapping/>
   </p:clrMapOvr>
 </p:sld>
+</file>
+
+<file path=ppt/slides/slide11.xml><?xml version="1.0" encoding="utf-8"?>
+<ns0:sld xmlns:ns0="http://schemas.openxmlformats.org/presentationml/2006/main" xmlns:ns1="http://schemas.openxmlformats.org/drawingml/2006/main">
+  <ns0:cSld name="USB change: reject &amp; restore.">
+    <ns0:bg>
+      <ns0:bgPr>
+        <ns1:solidFill>
+          <ns1:srgbClr val="F4F1E9"/>
+        </ns1:solidFill>
+        <ns1:effectLst/>
+      </ns0:bgPr>
+    </ns0:bg>
+    <ns0:spTree>
+      <ns0:nvGrpSpPr>
+        <ns0:cNvPr id="1" name="Slide objects"/>
+        <ns0:cNvGrpSpPr/>
+        <ns0:nvPr/>
+      </ns0:nvGrpSpPr>
+      <ns0:grpSpPr>
+        <ns1:xfrm>
+          <ns1:off x="0" y="0"/>
+          <ns1:ext cx="0" cy="0"/>
+          <ns1:chOff x="0" y="0"/>
+          <ns1:chExt cx="0" cy="0"/>
+        </ns1:xfrm>
+      </ns0:grpSpPr>
+      <ns0:sp>
+        <ns0:nvSpPr>
+          <ns0:cNvPr id="2" name="slide-header bottom"/>
+          <ns0:cNvSpPr/>
+          <ns0:nvPr/>
+        </ns0:nvSpPr>
+        <ns0:spPr>
+          <ns1:xfrm>
+            <ns1:off x="360883" y="898650"/>
+            <ns1:ext cx="11470234" cy="7620"/>
+          </ns1:xfrm>
+          <ns1:custGeom>
+            <ns1:avLst/>
+            <ns1:gdLst/>
+            <ns1:ahLst/>
+            <ns1:cxnLst/>
+            <ns1:rect l="0" t="0" r="r" b="b"/>
+            <ns1:pathLst>
+              <ns1:path w="1505280" h="1000" fill="none" stroke="1" extrusionOk="0">
+                <ns1:moveTo>
+                  <ns1:pt x="0" y="0"/>
+                </ns1:moveTo>
+                <ns1:lnTo>
+                  <ns1:pt x="1505280" y="0"/>
+                </ns1:lnTo>
+              </ns1:path>
+            </ns1:pathLst>
+          </ns1:custGeom>
+          <ns1:noFill/>
+          <ns1:ln w="7468" cap="flat">
+            <ns1:solidFill>
+              <ns1:srgbClr val="20231F"/>
+            </ns1:solidFill>
+            <ns1:round/>
+          </ns1:ln>
+        </ns0:spPr>
+      </ns0:sp>
+      <ns0:sp>
+        <ns0:nvSpPr>
+          <ns0:cNvPr id="3" name="method-title"/>
+          <ns0:cNvSpPr txBox="1"/>
+          <ns0:nvPr/>
+        </ns0:nvSpPr>
+        <ns0:spPr>
+          <ns1:xfrm>
+            <ns1:off x="360883" y="270205"/>
+            <ns1:ext cx="8442960" cy="576224"/>
+          </ns1:xfrm>
+          <ns1:prstGeom prst="rect">
+            <ns1:avLst/>
+          </ns1:prstGeom>
+          <ns1:noFill/>
+          <ns1:ln w="7620" cap="flat">
+            <ns1:noFill/>
+            <ns1:round/>
+          </ns1:ln>
+        </ns0:spPr>
+        <ns0:txBody>
+          <ns1:bodyPr wrap="none" lIns="0" rIns="0" tIns="0" bIns="0" anchor="t" rtlCol="0">
+            <ns1:noAutofit/>
+          </ns1:bodyPr>
+          <ns1:lstStyle/>
+          <ns1:p>
+            <ns1:pPr marL="0" indent="0" algn="l" fontAlgn="base">
+              <ns1:lnSpc>
+                <ns1:spcPts val="3302"/>
+              </ns1:lnSpc>
+              <ns1:spcBef>
+                <ns1:spcPts val="0"/>
+              </ns1:spcBef>
+              <ns1:spcAft>
+                <ns1:spcPts val="0"/>
+              </ns1:spcAft>
+              <ns1:buNone/>
+            </ns1:pPr>
+            <ns1:r>
+              <ns1:rPr lang="en-AU" sz="3175" b="1" spc="-127" dirty="0">
+                <ns1:solidFill>
+                  <ns1:srgbClr val="20231F"/>
+                </ns1:solidFill>
+                <ns1:latin typeface="Space Grotesk"/>
+                <ns1:ea typeface="Space Grotesk"/>
+                <ns1:cs typeface="Space Grotesk"/>
+              </ns1:rPr>
+              <ns1:t xml:space="preserve">USB change: reject &amp; restore.</ns1:t>
+            </ns1:r>
+            <ns1:endParaRPr lang="en-AU" sz="3175"/>
+          </ns1:p>
+        </ns0:txBody>
+      </ns0:sp>
+      <ns0:sp>
+        <ns0:nvSpPr>
+          <ns0:cNvPr id="4" name="wordmark"/>
+          <ns0:cNvSpPr txBox="1"/>
+          <ns0:nvPr/>
+        </ns0:nvSpPr>
+        <ns0:spPr>
+          <ns1:xfrm>
+            <ns1:off x="10739331" y="405205"/>
+            <ns1:ext cx="1152746" cy="314858"/>
+          </ns1:xfrm>
+          <ns1:prstGeom prst="rect">
+            <ns1:avLst/>
+          </ns1:prstGeom>
+          <ns1:noFill/>
+          <ns1:ln w="7620" cap="flat">
+            <ns1:noFill/>
+            <ns1:round/>
+          </ns1:ln>
+        </ns0:spPr>
+        <ns0:txBody>
+          <ns1:bodyPr wrap="none" lIns="0" rIns="0" tIns="0" bIns="0" anchor="t" rtlCol="0">
+            <ns1:noAutofit/>
+          </ns1:bodyPr>
+          <ns1:lstStyle/>
+          <ns1:p>
+            <ns1:pPr marL="0" indent="0" algn="l" fontAlgn="base">
+              <ns1:lnSpc>
+                <ns1:spcPts val="1529"/>
+              </ns1:lnSpc>
+              <ns1:spcBef>
+                <ns1:spcPts val="0"/>
+              </ns1:spcBef>
+              <ns1:spcAft>
+                <ns1:spcPts val="0"/>
+              </ns1:spcAft>
+              <ns1:buNone/>
+            </ns1:pPr>
+            <ns1:r>
+              <ns1:rPr lang="en-AU" sz="1529" b="1" spc="-46" dirty="0">
+                <ns1:solidFill>
+                  <ns1:srgbClr val="20231F"/>
+                </ns1:solidFill>
+                <ns1:latin typeface="Space Grotesk"/>
+                <ns1:ea typeface="Space Grotesk"/>
+                <ns1:cs typeface="Space Grotesk"/>
+              </ns1:rPr>
+              <ns1:t xml:space="preserve">CyberScope</ns1:t>
+            </ns1:r>
+            <ns1:endParaRPr lang="en-AU" sz="1529"/>
+          </ns1:p>
+        </ns0:txBody>
+      </ns0:sp>
+      <ns0:sp>
+        <ns0:nvSpPr>
+          <ns0:cNvPr id="5" name="P"/>
+          <ns0:cNvSpPr txBox="1"/>
+          <ns0:nvPr/>
+        </ns0:nvSpPr>
+        <ns0:spPr>
+          <ns1:xfrm>
+            <ns1:off x="360883" y="958391"/>
+            <ns1:ext cx="11109960" cy="284988"/>
+          </ns1:xfrm>
+          <ns1:prstGeom prst="rect">
+            <ns1:avLst/>
+          </ns1:prstGeom>
+          <ns1:noFill/>
+          <ns1:ln w="7620" cap="flat">
+            <ns1:noFill/>
+            <ns1:round/>
+          </ns1:ln>
+        </ns0:spPr>
+        <ns0:txBody>
+          <ns1:bodyPr wrap="none" lIns="0" rIns="0" tIns="0" bIns="0" anchor="t" rtlCol="0">
+            <ns1:noAutofit/>
+          </ns1:bodyPr>
+          <ns1:lstStyle/>
+          <ns1:p>
+            <ns1:pPr marL="0" indent="0" algn="l" fontAlgn="base">
+              <ns1:lnSpc>
+                <ns1:spcPts val="1352"/>
+              </ns1:lnSpc>
+              <ns1:spcBef>
+                <ns1:spcPts val="0"/>
+              </ns1:spcBef>
+              <ns1:spcAft>
+                <ns1:spcPts val="0"/>
+              </ns1:spcAft>
+              <ns1:buNone/>
+            </ns1:pPr>
+            <ns1:r>
+              <ns1:rPr lang="en-AU" sz="1352" b="0" spc="0" dirty="0">
+                <ns1:solidFill>
+                  <ns1:srgbClr val="20231F"/>
+                </ns1:solidFill>
+                <ns1:latin typeface="Space Grotesk"/>
+                <ns1:ea typeface="Space Grotesk"/>
+                <ns1:cs typeface="Space Grotesk"/>
+              </ns1:rPr>
+              <ns1:t xml:space="preserve">USB added → changed I2Map → mismatch → reject &amp; alert → restore &amp; recheck</ns1:t>
+            </ns1:r>
+            <ns1:endParaRPr lang="en-AU" sz="1352"/>
+          </ns1:p>
+        </ns0:txBody>
+      </ns0:sp>
+      <ns0:sp>
+        <ns0:nvSpPr>
+          <ns0:cNvPr id="6" name="client-host"/>
+          <ns0:cNvSpPr/>
+          <ns0:nvPr/>
+        </ns0:nvSpPr>
+        <ns0:spPr>
+          <ns1:xfrm>
+            <ns1:off x="622989" y="2392644"/>
+            <ns1:ext cx="5167337" cy="2343497"/>
+          </ns1:xfrm>
+          <ns1:prstGeom prst="roundRect">
+            <ns1:avLst>
+              <ns1:gd name="adj" fmla="val 4969"/>
+            </ns1:avLst>
+          </ns1:prstGeom>
+          <ns1:solidFill>
+            <ns1:srgbClr val="E7EDFC"/>
+          </ns1:solidFill>
+          <ns1:ln w="7278" cap="flat">
+            <ns1:solidFill>
+              <ns1:srgbClr val="C5D1EA"/>
+            </ns1:solidFill>
+            <ns1:round/>
+          </ns1:ln>
+        </ns0:spPr>
+      </ns0:sp>
+      <ns0:sp>
+        <ns0:nvSpPr>
+          <ns0:cNvPr id="7" name="verifier-host"/>
+          <ns0:cNvSpPr/>
+          <ns0:nvPr/>
+        </ns0:nvSpPr>
+        <ns0:spPr>
+          <ns1:xfrm>
+            <ns1:off x="6037777" y="2392644"/>
+            <ns1:ext cx="2547279" cy="1848597"/>
+          </ns1:xfrm>
+          <ns1:prstGeom prst="roundRect">
+            <ns1:avLst>
+              <ns1:gd name="adj" fmla="val 6299"/>
+            </ns1:avLst>
+          </ns1:prstGeom>
+          <ns1:solidFill>
+            <ns1:srgbClr val="E5F0EC"/>
+          </ns1:solidFill>
+          <ns1:ln w="7278" cap="flat">
+            <ns1:solidFill>
+              <ns1:srgbClr val="B9D6CC"/>
+            </ns1:solidFill>
+            <ns1:round/>
+          </ns1:ln>
+        </ns0:spPr>
+      </ns0:sp>
+      <ns0:sp>
+        <ns0:nvSpPr>
+          <ns0:cNvPr id="8" name="blockchain-host"/>
+          <ns0:cNvSpPr/>
+          <ns0:nvPr/>
+        </ns0:nvSpPr>
+        <ns0:spPr>
+          <ns1:xfrm>
+            <ns1:off x="8876173" y="2392644"/>
+            <ns1:ext cx="2547279" cy="1848597"/>
+          </ns1:xfrm>
+          <ns1:prstGeom prst="roundRect">
+            <ns1:avLst>
+              <ns1:gd name="adj" fmla="val 6299"/>
+            </ns1:avLst>
+          </ns1:prstGeom>
+          <ns1:solidFill>
+            <ns1:srgbClr val="ECE9DE"/>
+          </ns1:solidFill>
+          <ns1:ln w="7278" cap="flat">
+            <ns1:solidFill>
+              <ns1:srgbClr val="D2CDBC"/>
+            </ns1:solidFill>
+            <ns1:round/>
+          </ns1:ln>
+        </ns0:spPr>
+      </ns0:sp>
+      <ns0:sp>
+        <ns0:nvSpPr>
+          <ns0:cNvPr id="9" name="Host 1 · Client"/>
+          <ns0:cNvSpPr txBox="1"/>
+          <ns0:nvPr/>
+        </ns0:nvSpPr>
+        <ns0:spPr>
+          <ns1:xfrm>
+            <ns1:off x="768548" y="2458240"/>
+            <ns1:ext cx="1089660" cy="266700"/>
+          </ns1:xfrm>
+          <ns1:prstGeom prst="rect">
+            <ns1:avLst/>
+          </ns1:prstGeom>
+          <ns1:noFill/>
+          <ns1:ln w="7620" cap="flat">
+            <ns1:noFill/>
+            <ns1:round/>
+          </ns1:ln>
+        </ns0:spPr>
+        <ns0:txBody>
+          <ns1:bodyPr wrap="none" lIns="0" rIns="0" tIns="0" bIns="0" anchor="t" rtlCol="0">
+            <ns1:noAutofit/>
+          </ns1:bodyPr>
+          <ns1:lstStyle/>
+          <ns1:p>
+            <ns1:pPr marL="0" indent="0" algn="l" fontAlgn="base">
+              <ns1:lnSpc>
+                <ns1:spcPts val="1261"/>
+              </ns1:lnSpc>
+              <ns1:spcBef>
+                <ns1:spcPts val="0"/>
+              </ns1:spcBef>
+              <ns1:spcAft>
+                <ns1:spcPts val="0"/>
+              </ns1:spcAft>
+              <ns1:buNone/>
+            </ns1:pPr>
+            <ns1:r>
+              <ns1:rPr lang="en-AU" sz="1261" b="1" spc="0" dirty="0">
+                <ns1:solidFill>
+                  <ns1:srgbClr val="20231F"/>
+                </ns1:solidFill>
+                <ns1:latin typeface="Space Grotesk"/>
+                <ns1:ea typeface="Space Grotesk"/>
+                <ns1:cs typeface="Space Grotesk"/>
+              </ns1:rPr>
+              <ns1:t xml:space="preserve">Host 1 · Client</ns1:t>
+            </ns1:r>
+            <ns1:endParaRPr lang="en-AU" sz="1261"/>
+          </ns1:p>
+        </ns0:txBody>
+      </ns0:sp>
+      <ns0:sp>
+        <ns0:nvSpPr>
+          <ns0:cNvPr id="10" name="Physical Raspberry Pi"/>
+          <ns0:cNvSpPr txBox="1"/>
+          <ns0:nvPr/>
+        </ns0:nvSpPr>
+        <ns0:spPr>
+          <ns1:xfrm>
+            <ns1:off x="4320940" y="2496340"/>
+            <ns1:ext cx="1341120" cy="220980"/>
+          </ns1:xfrm>
+          <ns1:prstGeom prst="rect">
+            <ns1:avLst/>
+          </ns1:prstGeom>
+          <ns1:noFill/>
+          <ns1:ln w="7620" cap="flat">
+            <ns1:noFill/>
+            <ns1:round/>
+          </ns1:ln>
+        </ns0:spPr>
+        <ns0:txBody>
+          <ns1:bodyPr wrap="none" lIns="0" rIns="0" tIns="0" bIns="0" anchor="t" rtlCol="0">
+            <ns1:noAutofit/>
+          </ns1:bodyPr>
+          <ns1:lstStyle/>
+          <ns1:p>
+            <ns1:pPr marL="0" indent="0" algn="l" fontAlgn="base">
+              <ns1:lnSpc>
+                <ns1:spcPts val="974"/>
+              </ns1:lnSpc>
+              <ns1:spcBef>
+                <ns1:spcPts val="0"/>
+              </ns1:spcBef>
+              <ns1:spcAft>
+                <ns1:spcPts val="0"/>
+              </ns1:spcAft>
+              <ns1:buNone/>
+            </ns1:pPr>
+            <ns1:r>
+              <ns1:rPr lang="en-AU" sz="974" b="0" spc="0" dirty="0">
+                <ns1:solidFill>
+                  <ns1:srgbClr val="60645B"/>
+                </ns1:solidFill>
+                <ns1:latin typeface="Space Grotesk"/>
+                <ns1:ea typeface="Space Grotesk"/>
+                <ns1:cs typeface="Space Grotesk"/>
+              </ns1:rPr>
+              <ns1:t xml:space="preserve">Physical Raspberry Pi</ns1:t>
+            </ns1:r>
+            <ns1:endParaRPr lang="en-AU" sz="974"/>
+          </ns1:p>
+        </ns0:txBody>
+      </ns0:sp>
+      <ns0:sp>
+        <ns0:nvSpPr>
+          <ns0:cNvPr id="11" name="Host 2 · Verifier"/>
+          <ns0:cNvSpPr txBox="1"/>
+          <ns0:nvPr/>
+        </ns0:nvSpPr>
+        <ns0:spPr>
+          <ns1:xfrm>
+            <ns1:off x="6183336" y="2458240"/>
+            <ns1:ext cx="1211580" cy="266700"/>
+          </ns1:xfrm>
+          <ns1:prstGeom prst="rect">
+            <ns1:avLst/>
+          </ns1:prstGeom>
+          <ns1:noFill/>
+          <ns1:ln w="7620" cap="flat">
+            <ns1:noFill/>
+            <ns1:round/>
+          </ns1:ln>
+        </ns0:spPr>
+        <ns0:txBody>
+          <ns1:bodyPr wrap="none" lIns="0" rIns="0" tIns="0" bIns="0" anchor="t" rtlCol="0">
+            <ns1:noAutofit/>
+          </ns1:bodyPr>
+          <ns1:lstStyle/>
+          <ns1:p>
+            <ns1:pPr marL="0" indent="0" algn="l" fontAlgn="base">
+              <ns1:lnSpc>
+                <ns1:spcPts val="1261"/>
+              </ns1:lnSpc>
+              <ns1:spcBef>
+                <ns1:spcPts val="0"/>
+              </ns1:spcBef>
+              <ns1:spcAft>
+                <ns1:spcPts val="0"/>
+              </ns1:spcAft>
+              <ns1:buNone/>
+            </ns1:pPr>
+            <ns1:r>
+              <ns1:rPr lang="en-AU" sz="1261" b="1" spc="0" dirty="0">
+                <ns1:solidFill>
+                  <ns1:srgbClr val="20231F"/>
+                </ns1:solidFill>
+                <ns1:latin typeface="Space Grotesk"/>
+                <ns1:ea typeface="Space Grotesk"/>
+                <ns1:cs typeface="Space Grotesk"/>
+              </ns1:rPr>
+              <ns1:t xml:space="preserve">Host 2 · Verifier</ns1:t>
+            </ns1:r>
+            <ns1:endParaRPr lang="en-AU" sz="1261"/>
+          </ns1:p>
+        </ns0:txBody>
+      </ns0:sp>
+      <ns0:sp>
+        <ns0:nvSpPr>
+          <ns0:cNvPr id="12" name="Host 3 · Blockchain"/>
+          <ns0:cNvSpPr txBox="1"/>
+          <ns0:nvPr/>
+        </ns0:nvSpPr>
+        <ns0:spPr>
+          <ns1:xfrm>
+            <ns1:off x="9021732" y="2458240"/>
+            <ns1:ext cx="1508760" cy="266700"/>
+          </ns1:xfrm>
+          <ns1:prstGeom prst="rect">
+            <ns1:avLst/>
+          </ns1:prstGeom>
+          <ns1:noFill/>
+          <ns1:ln w="7620" cap="flat">
+            <ns1:noFill/>
+            <ns1:round/>
+          </ns1:ln>
+        </ns0:spPr>
+        <ns0:txBody>
+          <ns1:bodyPr wrap="none" lIns="0" rIns="0" tIns="0" bIns="0" anchor="t" rtlCol="0">
+            <ns1:noAutofit/>
+          </ns1:bodyPr>
+          <ns1:lstStyle/>
+          <ns1:p>
+            <ns1:pPr marL="0" indent="0" algn="l" fontAlgn="base">
+              <ns1:lnSpc>
+                <ns1:spcPts val="1261"/>
+              </ns1:lnSpc>
+              <ns1:spcBef>
+                <ns1:spcPts val="0"/>
+              </ns1:spcBef>
+              <ns1:spcAft>
+                <ns1:spcPts val="0"/>
+              </ns1:spcAft>
+              <ns1:buNone/>
+            </ns1:pPr>
+            <ns1:r>
+              <ns1:rPr lang="en-AU" sz="1261" b="1" spc="0" dirty="0">
+                <ns1:solidFill>
+                  <ns1:srgbClr val="20231F"/>
+                </ns1:solidFill>
+                <ns1:latin typeface="Space Grotesk"/>
+                <ns1:ea typeface="Space Grotesk"/>
+                <ns1:cs typeface="Space Grotesk"/>
+              </ns1:rPr>
+              <ns1:t xml:space="preserve">Host 3 · Blockchain</ns1:t>
+            </ns1:r>
+            <ns1:endParaRPr lang="en-AU" sz="1261"/>
+          </ns1:p>
+        </ns0:txBody>
+      </ns0:sp>
+      <ns0:sp>
+        <ns0:nvSpPr>
+          <ns0:cNvPr id="13" name="approve-path"/>
+          <ns0:cNvSpPr/>
+          <ns0:nvPr/>
+        </ns0:nvSpPr>
+        <ns0:spPr>
+          <ns1:xfrm>
+            <ns1:off x="1481786" y="1628460"/>
+            <ns1:ext cx="3202294" cy="1310029"/>
+          </ns1:xfrm>
+          <ns1:custGeom>
+            <ns1:avLst/>
+            <ns1:gdLst/>
+            <ns1:ahLst/>
+            <ns1:cxnLst/>
+            <ns1:rect l="0" t="0" r="r" b="b"/>
+            <ns1:pathLst>
+              <ns1:path w="420249" h="171920" fill="none" stroke="1" extrusionOk="0">
+                <ns1:moveTo>
+                  <ns1:pt x="420249" y="0"/>
+                </ns1:moveTo>
+                <ns1:lnTo>
+                  <ns1:pt x="131805" y="0"/>
+                </ns1:lnTo>
+                <ns1:quadBezTo>
+                  <ns1:pt x="112703" y="0"/>
+                  <ns1:pt x="112703" y="19102"/>
+                </ns1:quadBezTo>
+                <ns1:lnTo>
+                  <ns1:pt x="112703" y="133715"/>
+                </ns1:lnTo>
+                <ns1:quadBezTo>
+                  <ns1:pt x="112703" y="150907"/>
+                  <ns1:pt x="95511" y="150907"/>
+                </ns1:quadBezTo>
+                <ns1:lnTo>
+                  <ns1:pt x="17192" y="150907"/>
+                </ns1:lnTo>
+                <ns1:quadBezTo>
+                  <ns1:pt x="0" y="150907"/>
+                  <ns1:pt x="0" y="168099"/>
+                </ns1:quadBezTo>
+                <ns1:lnTo>
+                  <ns1:pt x="0" y="171920"/>
+                </ns1:lnTo>
+              </ns1:path>
+            </ns1:pathLst>
+          </ns1:custGeom>
+          <ns1:noFill/>
+          <ns1:ln w="12372" cap="flat">
+            <ns1:solidFill>
+              <ns1:srgbClr val="60645B"/>
+            </ns1:solidFill>
+            <ns1:round/>
+            <ns1:headEnd type="none" w="sm" len="sm"/>
+            <ns1:tailEnd type="triangle" w="sm" len="sm"/>
+          </ns1:ln>
+        </ns0:spPr>
+      </ns0:sp>
+      <ns0:sp>
+        <ns0:nvSpPr>
+          <ns0:cNvPr id="14" name="parameter-path"/>
+          <ns0:cNvSpPr/>
+          <ns0:nvPr/>
+        </ns0:nvSpPr>
+        <ns0:spPr>
+          <ns1:xfrm>
+            <ns1:off x="2195024" y="3484335"/>
+            <ns1:ext cx="567679" cy="7620"/>
+          </ns1:xfrm>
+          <ns1:custGeom>
+            <ns1:avLst/>
+            <ns1:gdLst/>
+            <ns1:ahLst/>
+            <ns1:cxnLst/>
+            <ns1:rect l="0" t="0" r="r" b="b"/>
+            <ns1:pathLst>
+              <ns1:path w="74499" h="1000" fill="none" stroke="1" extrusionOk="0">
+                <ns1:moveTo>
+                  <ns1:pt x="0" y="0"/>
+                </ns1:moveTo>
+                <ns1:lnTo>
+                  <ns1:pt x="74499" y="0"/>
+                </ns1:lnTo>
+              </ns1:path>
+            </ns1:pathLst>
+          </ns1:custGeom>
+          <ns1:noFill/>
+          <ns1:ln w="20574" cap="flat">
+            <ns1:solidFill>
+              <ns1:srgbClr val="C43E2D"/>
+            </ns1:solidFill>
+            <ns1:round/>
+            <ns1:headEnd type="none" w="sm" len="sm"/>
+            <ns1:tailEnd type="triangle" w="sm" len="sm"/>
+          </ns1:ln>
+        </ns0:spPr>
+      </ns0:sp>
+      <ns0:sp>
+        <ns0:nvSpPr>
+          <ns0:cNvPr id="15" name="digest-path"/>
+          <ns0:cNvSpPr/>
+          <ns0:nvPr/>
+        </ns0:nvSpPr>
+        <ns0:spPr>
+          <ns1:xfrm>
+            <ns1:off x="3665168" y="3484335"/>
+            <ns1:ext cx="582235" cy="7620"/>
+          </ns1:xfrm>
+          <ns1:custGeom>
+            <ns1:avLst/>
+            <ns1:gdLst/>
+            <ns1:ahLst/>
+            <ns1:cxnLst/>
+            <ns1:rect l="0" t="0" r="r" b="b"/>
+            <ns1:pathLst>
+              <ns1:path w="76409" h="1000" fill="none" stroke="1" extrusionOk="0">
+                <ns1:moveTo>
+                  <ns1:pt x="0" y="0"/>
+                </ns1:moveTo>
+                <ns1:lnTo>
+                  <ns1:pt x="76409" y="0"/>
+                </ns1:lnTo>
+              </ns1:path>
+            </ns1:pathLst>
+          </ns1:custGeom>
+          <ns1:noFill/>
+          <ns1:ln w="20574" cap="flat">
+            <ns1:solidFill>
+              <ns1:srgbClr val="C43E2D"/>
+            </ns1:solidFill>
+            <ns1:round/>
+            <ns1:headEnd type="none" w="sm" len="sm"/>
+            <ns1:tailEnd type="triangle" w="sm" len="sm"/>
+          </ns1:ln>
+        </ns0:spPr>
+      </ns0:sp>
+      <ns0:sp>
+        <ns0:nvSpPr>
+          <ns0:cNvPr id="16" name="sensor-path"/>
+          <ns0:cNvSpPr/>
+          <ns0:nvPr/>
+        </ns0:nvSpPr>
+        <ns0:spPr>
+          <ns1:xfrm>
+            <ns1:off x="3890784" y="3993790"/>
+            <ns1:ext cx="1069857" cy="414843"/>
+          </ns1:xfrm>
+          <ns1:custGeom>
+            <ns1:avLst/>
+            <ns1:gdLst/>
+            <ns1:ahLst/>
+            <ns1:cxnLst/>
+            <ns1:rect l="0" t="0" r="r" b="b"/>
+            <ns1:pathLst>
+              <ns1:path w="140401" h="54441" fill="none" stroke="1" extrusionOk="0">
+                <ns1:moveTo>
+                  <ns1:pt x="0" y="54441"/>
+                </ns1:moveTo>
+                <ns1:lnTo>
+                  <ns1:pt x="123209" y="54441"/>
+                </ns1:lnTo>
+                <ns1:quadBezTo>
+                  <ns1:pt x="140401" y="54441"/>
+                  <ns1:pt x="140401" y="37249"/>
+                </ns1:quadBezTo>
+                <ns1:lnTo>
+                  <ns1:pt x="140401" y="0"/>
+                </ns1:lnTo>
+              </ns1:path>
+            </ns1:pathLst>
+          </ns1:custGeom>
+          <ns1:noFill/>
+          <ns1:ln w="12372" cap="flat">
+            <ns1:solidFill>
+              <ns1:srgbClr val="08766B"/>
+            </ns1:solidFill>
+            <ns1:round/>
+            <ns1:headEnd type="none" w="sm" len="sm"/>
+            <ns1:tailEnd type="triangle" w="sm" len="sm"/>
+          </ns1:ln>
+        </ns0:spPr>
+      </ns0:sp>
+      <ns0:sp>
+        <ns0:nvSpPr>
+          <ns0:cNvPr id="17" name="submit-path"/>
+          <ns0:cNvSpPr/>
+          <ns0:nvPr/>
+        </ns0:nvSpPr>
+        <ns0:spPr>
+          <ns1:xfrm>
+            <ns1:off x="5440986" y="2065136"/>
+            <ns1:ext cx="5909687" cy="1419198"/>
+          </ns1:xfrm>
+          <ns1:custGeom>
+            <ns1:avLst/>
+            <ns1:gdLst/>
+            <ns1:ahLst/>
+            <ns1:cxnLst/>
+            <ns1:rect l="0" t="0" r="r" b="b"/>
+            <ns1:pathLst>
+              <ns1:path w="775550" h="186246" fill="none" stroke="1" extrusionOk="0">
+                <ns1:moveTo>
+                  <ns1:pt x="0" y="186246"/>
+                </ns1:moveTo>
+                <ns1:lnTo>
+                  <ns1:pt x="40115" y="186246"/>
+                </ns1:lnTo>
+                <ns1:quadBezTo>
+                  <ns1:pt x="57307" y="186246"/>
+                  <ns1:pt x="57307" y="169055"/>
+                </ns1:quadBezTo>
+                <ns1:lnTo>
+                  <ns1:pt x="57307" y="17192"/>
+                </ns1:lnTo>
+                <ns1:quadBezTo>
+                  <ns1:pt x="57307" y="0"/>
+                  <ns1:pt x="74499" y="0"/>
+                </ns1:quadBezTo>
+                <ns1:lnTo>
+                  <ns1:pt x="758358" y="0"/>
+                </ns1:lnTo>
+                <ns1:quadBezTo>
+                  <ns1:pt x="775550" y="0"/>
+                  <ns1:pt x="775550" y="17192"/>
+                </ns1:quadBezTo>
+                <ns1:lnTo>
+                  <ns1:pt x="775550" y="124164"/>
+                </ns1:lnTo>
+                <ns1:quadBezTo>
+                  <ns1:pt x="775550" y="137536"/>
+                  <ns1:pt x="762178" y="137536"/>
+                </ns1:quadBezTo>
+              </ns1:path>
+            </ns1:pathLst>
+          </ns1:custGeom>
+          <ns1:noFill/>
+          <ns1:ln w="20574" cap="flat">
+            <ns1:solidFill>
+              <ns1:srgbClr val="C43E2D"/>
+            </ns1:solidFill>
+            <ns1:round/>
+            <ns1:headEnd type="none" w="sm" len="sm"/>
+            <ns1:tailEnd type="triangle" w="sm" len="sm"/>
+          </ns1:ln>
+        </ns0:spPr>
+      </ns0:sp>
+      <ns0:sp>
+        <ns0:nvSpPr>
+          <ns0:cNvPr id="18" name="store-path"/>
+          <ns0:cNvSpPr/>
+          <ns0:nvPr/>
+        </ns0:nvSpPr>
+        <ns0:spPr>
+          <ns1:xfrm>
+            <ns1:off x="10149813" y="3367888"/>
+            <ns1:ext cx="7620" cy="232894"/>
+          </ns1:xfrm>
+          <ns1:custGeom>
+            <ns1:avLst/>
+            <ns1:gdLst/>
+            <ns1:ahLst/>
+            <ns1:cxnLst/>
+            <ns1:rect l="0" t="0" r="r" b="b"/>
+            <ns1:pathLst>
+              <ns1:path w="1000" h="30564" fill="none" stroke="1" extrusionOk="0">
+                <ns1:moveTo>
+                  <ns1:pt x="0" y="0"/>
+                </ns1:moveTo>
+                <ns1:lnTo>
+                  <ns1:pt x="0" y="30564"/>
+                </ns1:lnTo>
+              </ns1:path>
+            </ns1:pathLst>
+          </ns1:custGeom>
+          <ns1:noFill/>
+          <ns1:ln w="12372" cap="flat">
+            <ns1:solidFill>
+              <ns1:srgbClr val="214BE0"/>
+            </ns1:solidFill>
+            <ns1:round/>
+            <ns1:headEnd type="none" w="sm" len="sm"/>
+            <ns1:tailEnd type="triangle" w="sm" len="sm"/>
+          </ns1:ln>
+        </ns0:spPr>
+      </ns0:sp>
+      <ns0:sp>
+        <ns0:nvSpPr>
+          <ns0:cNvPr id="19" name="forward-path"/>
+          <ns0:cNvSpPr/>
+          <ns0:nvPr/>
+        </ns0:nvSpPr>
+        <ns0:spPr>
+          <ns1:xfrm>
+            <ns1:off x="8410385" y="3113160"/>
+            <ns1:ext cx="640459" cy="94613"/>
+          </ns1:xfrm>
+          <ns1:custGeom>
+            <ns1:avLst/>
+            <ns1:gdLst/>
+            <ns1:ahLst/>
+            <ns1:cxnLst/>
+            <ns1:rect l="0" t="0" r="r" b="b"/>
+            <ns1:pathLst>
+              <ns1:path w="84050" h="12416" fill="none" stroke="1" extrusionOk="0">
+                <ns1:moveTo>
+                  <ns1:pt x="84050" y="0"/>
+                </ns1:moveTo>
+                <ns1:lnTo>
+                  <ns1:pt x="66858" y="0"/>
+                </ns1:lnTo>
+                <ns1:quadBezTo>
+                  <ns1:pt x="53486" y="0"/>
+                  <ns1:pt x="53486" y="12416"/>
+                </ns1:quadBezTo>
+                <ns1:lnTo>
+                  <ns1:pt x="0" y="12416"/>
+                </ns1:lnTo>
+              </ns1:path>
+            </ns1:pathLst>
+          </ns1:custGeom>
+          <ns1:noFill/>
+          <ns1:ln w="20574" cap="flat">
+            <ns1:solidFill>
+              <ns1:srgbClr val="C43E2D"/>
+            </ns1:solidFill>
+            <ns1:round/>
+            <ns1:headEnd type="none" w="sm" len="sm"/>
+            <ns1:tailEnd type="triangle" w="sm" len="sm"/>
+          </ns1:ln>
+        </ns0:spPr>
+      </ns0:sp>
+      <ns0:sp>
+        <ns0:nvSpPr>
+          <ns0:cNvPr id="20" name="baseline-path"/>
+          <ns0:cNvSpPr/>
+          <ns0:nvPr/>
+        </ns0:nvSpPr>
+        <ns0:spPr>
+          <ns1:xfrm>
+            <ns1:off x="8410385" y="3804564"/>
+            <ns1:ext cx="640459" cy="7620"/>
+          </ns1:xfrm>
+          <ns1:custGeom>
+            <ns1:avLst/>
+            <ns1:gdLst/>
+            <ns1:ahLst/>
+            <ns1:cxnLst/>
+            <ns1:rect l="0" t="0" r="r" b="b"/>
+            <ns1:pathLst>
+              <ns1:path w="84050" h="1000" fill="none" stroke="1" extrusionOk="0">
+                <ns1:moveTo>
+                  <ns1:pt x="84050" y="0"/>
+                </ns1:moveTo>
+                <ns1:lnTo>
+                  <ns1:pt x="0" y="0"/>
+                </ns1:lnTo>
+              </ns1:path>
+            </ns1:pathLst>
+          </ns1:custGeom>
+          <ns1:noFill/>
+          <ns1:ln w="12372" cap="flat">
+            <ns1:solidFill>
+              <ns1:srgbClr val="214BE0"/>
+            </ns1:solidFill>
+            <ns1:round/>
+            <ns1:headEnd type="none" w="sm" len="sm"/>
+            <ns1:tailEnd type="triangle" w="sm" len="sm"/>
+          </ns1:ln>
+        </ns0:spPr>
+      </ns0:sp>
+      <ns0:sp>
+        <ns0:nvSpPr>
+          <ns0:cNvPr id="21" name="accept-path"/>
+          <ns0:cNvSpPr/>
+          <ns0:nvPr/>
+        </ns0:nvSpPr>
+        <ns0:spPr>
+          <ns1:xfrm>
+            <ns1:off x="6911129" y="4022902"/>
+            <ns1:ext cx="101891" cy="502178"/>
+          </ns1:xfrm>
+          <ns1:custGeom>
+            <ns1:avLst/>
+            <ns1:gdLst/>
+            <ns1:ahLst/>
+            <ns1:cxnLst/>
+            <ns1:rect l="0" t="0" r="r" b="b"/>
+            <ns1:pathLst>
+              <ns1:path w="13372" h="65903" fill="none" stroke="1" extrusionOk="0">
+                <ns1:moveTo>
+                  <ns1:pt x="0" y="0"/>
+                </ns1:moveTo>
+                <ns1:lnTo>
+                  <ns1:pt x="0" y="39160"/>
+                </ns1:lnTo>
+                <ns1:quadBezTo>
+                  <ns1:pt x="0" y="52531"/>
+                  <ns1:pt x="13372" y="52531"/>
+                </ns1:quadBezTo>
+                <ns1:lnTo>
+                  <ns1:pt x="13372" y="65903"/>
+                </ns1:lnTo>
+              </ns1:path>
+            </ns1:pathLst>
+          </ns1:custGeom>
+          <ns1:noFill/>
+          <ns1:ln w="12372" cap="flat">
+            <ns1:solidFill>
+              <ns1:srgbClr val="08766B">
+                <ns1:alpha val="30000"/>
+              </ns1:srgbClr>
+            </ns1:solidFill>
+            <ns1:round/>
+            <ns1:headEnd type="none" w="sm" len="sm"/>
+            <ns1:tailEnd type="triangle" w="sm" len="sm"/>
+          </ns1:ln>
+        </ns0:spPr>
+      </ns0:sp>
+      <ns0:sp>
+        <ns0:nvSpPr>
+          <ns0:cNvPr id="22" name="reject-path"/>
+          <ns0:cNvSpPr/>
+          <ns0:nvPr/>
+        </ns0:nvSpPr>
+        <ns0:spPr>
+          <ns1:xfrm>
+            <ns1:off x="7930041" y="4022902"/>
+            <ns1:ext cx="2518167" cy="502178"/>
+          </ns1:xfrm>
+          <ns1:custGeom>
+            <ns1:avLst/>
+            <ns1:gdLst/>
+            <ns1:ahLst/>
+            <ns1:cxnLst/>
+            <ns1:rect l="0" t="0" r="r" b="b"/>
+            <ns1:pathLst>
+              <ns1:path w="330468" h="65903" fill="none" stroke="1" extrusionOk="0">
+                <ns1:moveTo>
+                  <ns1:pt x="0" y="0"/>
+                </ns1:moveTo>
+                <ns1:lnTo>
+                  <ns1:pt x="0" y="30564"/>
+                </ns1:lnTo>
+                <ns1:quadBezTo>
+                  <ns1:pt x="0" y="47756"/>
+                  <ns1:pt x="17192" y="47756"/>
+                </ns1:quadBezTo>
+                <ns1:lnTo>
+                  <ns1:pt x="313276" y="47756"/>
+                </ns1:lnTo>
+                <ns1:quadBezTo>
+                  <ns1:pt x="330468" y="47756"/>
+                  <ns1:pt x="330468" y="64947"/>
+                </ns1:quadBezTo>
+                <ns1:lnTo>
+                  <ns1:pt x="330468" y="65903"/>
+                </ns1:lnTo>
+              </ns1:path>
+            </ns1:pathLst>
+          </ns1:custGeom>
+          <ns1:noFill/>
+          <ns1:ln w="20574" cap="flat">
+            <ns1:solidFill>
+              <ns1:srgbClr val="C43E2D"/>
+            </ns1:solidFill>
+            <ns1:round/>
+            <ns1:headEnd type="none" w="sm" len="sm"/>
+            <ns1:tailEnd type="triangle" w="sm" len="sm"/>
+          </ns1:ln>
+        </ns0:spPr>
+      </ns0:sp>
+      <ns0:sp>
+        <ns0:nvSpPr>
+          <ns0:cNvPr id="23" name="consumer-path"/>
+          <ns0:cNvSpPr/>
+          <ns0:nvPr/>
+        </ns0:nvSpPr>
+        <ns0:spPr>
+          <ns1:xfrm>
+            <ns1:off x="7813594" y="4794364"/>
+            <ns1:ext cx="116447" cy="7620"/>
+          </ns1:xfrm>
+          <ns1:custGeom>
+            <ns1:avLst/>
+            <ns1:gdLst/>
+            <ns1:ahLst/>
+            <ns1:cxnLst/>
+            <ns1:rect l="0" t="0" r="r" b="b"/>
+            <ns1:pathLst>
+              <ns1:path w="15282" h="1000" fill="none" stroke="1" extrusionOk="0">
+                <ns1:moveTo>
+                  <ns1:pt x="0" y="0"/>
+                </ns1:moveTo>
+                <ns1:lnTo>
+                  <ns1:pt x="15282" y="0"/>
+                </ns1:lnTo>
+              </ns1:path>
+            </ns1:pathLst>
+          </ns1:custGeom>
+          <ns1:noFill/>
+          <ns1:ln w="12372" cap="flat">
+            <ns1:solidFill>
+              <ns1:srgbClr val="08766B">
+                <ns1:alpha val="30000"/>
+              </ns1:srgbClr>
+            </ns1:solidFill>
+            <ns1:round/>
+            <ns1:headEnd type="none" w="sm" len="sm"/>
+            <ns1:tailEnd type="triangle" w="sm" len="sm"/>
+          </ns1:ln>
+        </ns0:spPr>
+      </ns0:sp>
+      <ns0:sp>
+        <ns0:nvSpPr>
+          <ns0:cNvPr id="24" name="alert-path"/>
+          <ns0:cNvSpPr/>
+          <ns0:nvPr/>
+        </ns0:nvSpPr>
+        <ns0:spPr>
+          <ns1:xfrm>
+            <ns1:off x="5521043" y="1279119"/>
+            <ns1:ext cx="6164415" cy="3515245"/>
+          </ns1:xfrm>
+          <ns1:custGeom>
+            <ns1:avLst/>
+            <ns1:gdLst/>
+            <ns1:ahLst/>
+            <ns1:cxnLst/>
+            <ns1:rect l="0" t="0" r="r" b="b"/>
+            <ns1:pathLst>
+              <ns1:path w="808978" h="461318" fill="none" stroke="1" extrusionOk="0">
+                <ns1:moveTo>
+                  <ns1:pt x="751672" y="461318"/>
+                </ns1:moveTo>
+                <ns1:lnTo>
+                  <ns1:pt x="791786" y="461318"/>
+                </ns1:lnTo>
+                <ns1:quadBezTo>
+                  <ns1:pt x="808978" y="461318"/>
+                  <ns1:pt x="808978" y="444126"/>
+                </ns1:quadBezTo>
+                <ns1:lnTo>
+                  <ns1:pt x="808978" y="17192"/>
+                </ns1:lnTo>
+                <ns1:quadBezTo>
+                  <ns1:pt x="808978" y="0"/>
+                  <ns1:pt x="791786" y="0"/>
+                </ns1:quadBezTo>
+                <ns1:lnTo>
+                  <ns1:pt x="17192" y="0"/>
+                </ns1:lnTo>
+                <ns1:quadBezTo>
+                  <ns1:pt x="0" y="0"/>
+                  <ns1:pt x="0" y="11461"/>
+                </ns1:quadBezTo>
+              </ns1:path>
+            </ns1:pathLst>
+          </ns1:custGeom>
+          <ns1:noFill/>
+          <ns1:ln w="20574" cap="flat">
+            <ns1:solidFill>
+              <ns1:srgbClr val="C43E2D"/>
+            </ns1:solidFill>
+            <ns1:round/>
+            <ns1:headEnd type="none" w="sm" len="sm"/>
+            <ns1:tailEnd type="triangle" w="sm" len="sm"/>
+          </ns1:ln>
+        </ns0:spPr>
+      </ns0:sp>
+      <ns0:sp>
+        <ns0:nvSpPr>
+          <ns0:cNvPr id="25" name="Approve known-good state"/>
+          <ns0:cNvSpPr txBox="1"/>
+          <ns0:nvPr/>
+        </ns0:nvSpPr>
+        <ns0:spPr>
+          <ns1:xfrm>
+            <ns1:off x="2835483" y="1354045"/>
+            <ns1:ext cx="1600200" cy="205740"/>
+          </ns1:xfrm>
+          <ns1:prstGeom prst="rect">
+            <ns1:avLst/>
+          </ns1:prstGeom>
+          <ns1:noFill/>
+          <ns1:ln w="7620" cap="flat">
+            <ns1:noFill/>
+            <ns1:round/>
+          </ns1:ln>
+        </ns0:spPr>
+        <ns0:txBody>
+          <ns1:bodyPr wrap="none" lIns="0" rIns="0" tIns="0" bIns="0" anchor="t" rtlCol="0">
+            <ns1:noAutofit/>
+          </ns1:bodyPr>
+          <ns1:lstStyle/>
+          <ns1:p>
+            <ns1:pPr marL="0" indent="0" algn="l" fontAlgn="base">
+              <ns1:lnSpc>
+                <ns1:spcPts val="917"/>
+              </ns1:lnSpc>
+              <ns1:spcBef>
+                <ns1:spcPts val="0"/>
+              </ns1:spcBef>
+              <ns1:spcAft>
+                <ns1:spcPts val="0"/>
+              </ns1:spcAft>
+              <ns1:buNone/>
+            </ns1:pPr>
+            <ns1:r>
+              <ns1:rPr lang="en-AU" sz="917" b="0" spc="0" dirty="0">
+                <ns1:solidFill>
+                  <ns1:srgbClr val="60645B"/>
+                </ns1:solidFill>
+                <ns1:latin typeface="Space Grotesk"/>
+                <ns1:ea typeface="Space Grotesk"/>
+                <ns1:cs typeface="Space Grotesk"/>
+              </ns1:rPr>
+              <ns1:t xml:space="preserve">Restore approved state</ns1:t>
+            </ns1:r>
+            <ns1:endParaRPr lang="en-AU" sz="917"/>
+          </ns1:p>
+        </ns0:txBody>
+      </ns0:sp>
+      <ns0:sp>
+        <ns0:nvSpPr>
+          <ns0:cNvPr id="26" name="Send I2Map to blockchain"/>
+          <ns0:cNvSpPr txBox="1"/>
+          <ns0:nvPr/>
+        </ns0:nvSpPr>
+        <ns0:spPr>
+          <ns1:xfrm>
+            <ns1:off x="7061892" y="1783444"/>
+            <ns1:ext cx="2423160" cy="205740"/>
+          </ns1:xfrm>
+          <ns1:prstGeom prst="rect">
+            <ns1:avLst/>
+          </ns1:prstGeom>
+          <ns1:noFill/>
+          <ns1:ln w="7620" cap="flat">
+            <ns1:noFill/>
+            <ns1:round/>
+          </ns1:ln>
+        </ns0:spPr>
+        <ns0:txBody>
+          <ns1:bodyPr wrap="none" lIns="0" rIns="0" tIns="0" bIns="0" anchor="t" rtlCol="0">
+            <ns1:noAutofit/>
+          </ns1:bodyPr>
+          <ns1:lstStyle/>
+          <ns1:p>
+            <ns1:pPr marL="0" indent="0" algn="l" fontAlgn="base">
+              <ns1:lnSpc>
+                <ns1:spcPts val="917"/>
+              </ns1:lnSpc>
+              <ns1:spcBef>
+                <ns1:spcPts val="0"/>
+              </ns1:spcBef>
+              <ns1:spcAft>
+                <ns1:spcPts val="0"/>
+              </ns1:spcAft>
+              <ns1:buNone/>
+            </ns1:pPr>
+            <ns1:r>
+              <ns1:rPr lang="en-AU" sz="917" b="0" spc="0" dirty="0">
+                <ns1:solidFill>
+                  <ns1:srgbClr val="C43E2D"/>
+                </ns1:solidFill>
+                <ns1:latin typeface="Space Grotesk"/>
+                <ns1:ea typeface="Space Grotesk"/>
+                <ns1:cs typeface="Space Grotesk"/>
+              </ns1:rPr>
+              <ns1:t xml:space="preserve">Send changed I2Map to blockchain</ns1:t>
+            </ns1:r>
+            <ns1:endParaRPr lang="en-AU" sz="917"/>
+          </ns1:p>
+        </ns0:txBody>
+      </ns0:sp>
+      <ns0:sp>
+        <ns0:nvSpPr>
+          <ns0:cNvPr id="27" name="I2Map"/>
+          <ns0:cNvSpPr txBox="1"/>
+          <ns0:nvPr/>
+        </ns0:nvSpPr>
+        <ns0:spPr>
+          <ns1:xfrm>
+            <ns1:off x="8559165" y="2896969"/>
+            <ns1:ext cx="403861" cy="205740"/>
+          </ns1:xfrm>
+          <ns1:prstGeom prst="rect">
+            <ns1:avLst/>
+          </ns1:prstGeom>
+          <ns1:noFill/>
+          <ns1:ln w="7620" cap="flat">
+            <ns1:noFill/>
+            <ns1:round/>
+          </ns1:ln>
+        </ns0:spPr>
+        <ns0:txBody>
+          <ns1:bodyPr wrap="none" lIns="0" rIns="0" tIns="0" bIns="0" anchor="t" rtlCol="0">
+            <ns1:noAutofit/>
+          </ns1:bodyPr>
+          <ns1:lstStyle/>
+          <ns1:p>
+            <ns1:pPr marL="0" indent="0" algn="l" fontAlgn="base">
+              <ns1:lnSpc>
+                <ns1:spcPts val="917"/>
+              </ns1:lnSpc>
+              <ns1:spcBef>
+                <ns1:spcPts val="0"/>
+              </ns1:spcBef>
+              <ns1:spcAft>
+                <ns1:spcPts val="0"/>
+              </ns1:spcAft>
+              <ns1:buNone/>
+            </ns1:pPr>
+            <ns1:r>
+              <ns1:rPr lang="en-AU" sz="917" b="0" spc="0" dirty="0">
+                <ns1:solidFill>
+                  <ns1:srgbClr val="C43E2D"/>
+                </ns1:solidFill>
+                <ns1:latin typeface="Space Grotesk"/>
+                <ns1:ea typeface="Space Grotesk"/>
+                <ns1:cs typeface="Space Grotesk"/>
+              </ns1:rPr>
+              <ns1:t xml:space="preserve">I2Map</ns1:t>
+            </ns1:r>
+            <ns1:endParaRPr lang="en-AU" sz="917"/>
+          </ns1:p>
+        </ns0:txBody>
+      </ns0:sp>
+      <ns0:sp>
+        <ns0:nvSpPr>
+          <ns0:cNvPr id="28" name="Baseline"/>
+          <ns0:cNvSpPr txBox="1"/>
+          <ns0:nvPr/>
+        </ns0:nvSpPr>
+        <ns0:spPr>
+          <ns1:xfrm>
+            <ns1:off x="8494395" y="3551983"/>
+            <ns1:ext cx="533400" cy="205740"/>
+          </ns1:xfrm>
+          <ns1:prstGeom prst="rect">
+            <ns1:avLst/>
+          </ns1:prstGeom>
+          <ns1:noFill/>
+          <ns1:ln w="7620" cap="flat">
+            <ns1:noFill/>
+            <ns1:round/>
+          </ns1:ln>
+        </ns0:spPr>
+        <ns0:txBody>
+          <ns1:bodyPr wrap="none" lIns="0" rIns="0" tIns="0" bIns="0" anchor="t" rtlCol="0">
+            <ns1:noAutofit/>
+          </ns1:bodyPr>
+          <ns1:lstStyle/>
+          <ns1:p>
+            <ns1:pPr marL="0" indent="0" algn="l" fontAlgn="base">
+              <ns1:lnSpc>
+                <ns1:spcPts val="917"/>
+              </ns1:lnSpc>
+              <ns1:spcBef>
+                <ns1:spcPts val="0"/>
+              </ns1:spcBef>
+              <ns1:spcAft>
+                <ns1:spcPts val="0"/>
+              </ns1:spcAft>
+              <ns1:buNone/>
+            </ns1:pPr>
+            <ns1:r>
+              <ns1:rPr lang="en-AU" sz="917" b="0" spc="0" dirty="0">
+                <ns1:solidFill>
+                  <ns1:srgbClr val="60645B"/>
+                </ns1:solidFill>
+                <ns1:latin typeface="Space Grotesk"/>
+                <ns1:ea typeface="Space Grotesk"/>
+                <ns1:cs typeface="Space Grotesk"/>
+              </ns1:rPr>
+              <ns1:t xml:space="preserve">Baseline</ns1:t>
+            </ns1:r>
+            <ns1:endParaRPr lang="en-AU" sz="917"/>
+          </ns1:p>
+        </ns0:txBody>
+      </ns0:sp>
+      <ns0:sp>
+        <ns0:nvSpPr>
+          <ns0:cNvPr id="29" name="Match"/>
+          <ns0:cNvSpPr txBox="1"/>
+          <ns0:nvPr/>
+        </ns0:nvSpPr>
+        <ns0:spPr>
+          <ns1:xfrm>
+            <ns1:off x="6219962" y="4214276"/>
+            <ns1:ext cx="861060" cy="205740"/>
+          </ns1:xfrm>
+          <ns1:prstGeom prst="rect">
+            <ns1:avLst/>
+          </ns1:prstGeom>
+          <ns1:noFill/>
+          <ns1:ln w="7620" cap="flat">
+            <ns1:noFill/>
+            <ns1:round/>
+          </ns1:ln>
+        </ns0:spPr>
+        <ns0:txBody>
+          <ns1:bodyPr wrap="none" lIns="0" rIns="0" tIns="0" bIns="0" anchor="t" rtlCol="0">
+            <ns1:noAutofit/>
+          </ns1:bodyPr>
+          <ns1:lstStyle/>
+          <ns1:p>
+            <ns1:pPr marL="0" indent="0" algn="l" fontAlgn="base">
+              <ns1:lnSpc>
+                <ns1:spcPts val="917"/>
+              </ns1:lnSpc>
+              <ns1:spcBef>
+                <ns1:spcPts val="0"/>
+              </ns1:spcBef>
+              <ns1:spcAft>
+                <ns1:spcPts val="0"/>
+              </ns1:spcAft>
+              <ns1:buNone/>
+            </ns1:pPr>
+            <ns1:r>
+              <ns1:rPr lang="en-AU" sz="917" b="0" spc="0" dirty="0">
+                <ns1:solidFill>
+                  <ns1:srgbClr val="60645B"/>
+                </ns1:solidFill>
+                <ns1:latin typeface="Space Grotesk"/>
+                <ns1:ea typeface="Space Grotesk"/>
+                <ns1:cs typeface="Space Grotesk"/>
+              </ns1:rPr>
+              <ns1:t xml:space="preserve">After restore</ns1:t>
+            </ns1:r>
+            <ns1:endParaRPr lang="en-AU" sz="917"/>
+          </ns1:p>
+        </ns0:txBody>
+      </ns0:sp>
+      <ns0:sp>
+        <ns0:nvSpPr>
+          <ns0:cNvPr id="30" name="Mismatch"/>
+          <ns0:cNvSpPr txBox="1"/>
+          <ns0:nvPr/>
+        </ns0:nvSpPr>
+        <ns0:spPr>
+          <ns1:xfrm>
+            <ns1:off x="8169377" y="4221554"/>
+            <ns1:ext cx="746760" cy="205740"/>
+          </ns1:xfrm>
+          <ns1:prstGeom prst="rect">
+            <ns1:avLst/>
+          </ns1:prstGeom>
+          <ns1:noFill/>
+          <ns1:ln w="7620" cap="flat">
+            <ns1:noFill/>
+            <ns1:round/>
+          </ns1:ln>
+        </ns0:spPr>
+        <ns0:txBody>
+          <ns1:bodyPr wrap="none" lIns="0" rIns="0" tIns="0" bIns="0" anchor="t" rtlCol="0">
+            <ns1:noAutofit/>
+          </ns1:bodyPr>
+          <ns1:lstStyle/>
+          <ns1:p>
+            <ns1:pPr marL="0" indent="0" algn="l" fontAlgn="base">
+              <ns1:lnSpc>
+                <ns1:spcPts val="917"/>
+              </ns1:lnSpc>
+              <ns1:spcBef>
+                <ns1:spcPts val="0"/>
+              </ns1:spcBef>
+              <ns1:spcAft>
+                <ns1:spcPts val="0"/>
+              </ns1:spcAft>
+              <ns1:buNone/>
+            </ns1:pPr>
+            <ns1:r>
+              <ns1:rPr lang="en-AU" sz="917" b="1" spc="0" dirty="0">
+                <ns1:solidFill>
+                  <ns1:srgbClr val="C43E2D"/>
+                </ns1:solidFill>
+                <ns1:latin typeface="Space Grotesk"/>
+                <ns1:ea typeface="Space Grotesk"/>
+                <ns1:cs typeface="Space Grotesk"/>
+              </ns1:rPr>
+              <ns1:t xml:space="preserve">Mismatch</ns1:t>
+            </ns1:r>
+            <ns1:endParaRPr lang="en-AU" sz="917"/>
+          </ns1:p>
+        </ns0:txBody>
+      </ns0:sp>
+      <ns0:sp>
+        <ns0:nvSpPr>
+          <ns0:cNvPr id="31" name="Alert administrator / restore approved state"/>
+          <ns0:cNvSpPr txBox="1"/>
+          <ns0:nvPr/>
+        </ns0:nvSpPr>
+        <ns0:spPr>
+          <ns1:xfrm>
+            <ns1:off x="6993313" y="5124018"/>
+            <ns1:ext cx="2560321" cy="205740"/>
+          </ns1:xfrm>
+          <ns1:prstGeom prst="rect">
+            <ns1:avLst/>
+          </ns1:prstGeom>
+          <ns1:noFill/>
+          <ns1:ln w="7620" cap="flat">
+            <ns1:noFill/>
+            <ns1:round/>
+          </ns1:ln>
+        </ns0:spPr>
+        <ns0:txBody>
+          <ns1:bodyPr wrap="none" lIns="0" rIns="0" tIns="0" bIns="0" anchor="t" rtlCol="0">
+            <ns1:noAutofit/>
+          </ns1:bodyPr>
+          <ns1:lstStyle/>
+          <ns1:p>
+            <ns1:pPr marL="0" indent="0" algn="l" fontAlgn="base">
+              <ns1:lnSpc>
+                <ns1:spcPts val="917"/>
+              </ns1:lnSpc>
+              <ns1:spcBef>
+                <ns1:spcPts val="0"/>
+              </ns1:spcBef>
+              <ns1:spcAft>
+                <ns1:spcPts val="0"/>
+              </ns1:spcAft>
+              <ns1:buNone/>
+            </ns1:pPr>
+            <ns1:r>
+              <ns1:rPr lang="en-AU" sz="917" b="0" spc="0" dirty="0">
+                <ns1:solidFill>
+                  <ns1:srgbClr val="60645B"/>
+                </ns1:solidFill>
+                <ns1:latin typeface="Space Grotesk"/>
+                <ns1:ea typeface="Space Grotesk"/>
+                <ns1:cs typeface="Space Grotesk"/>
+              </ns1:rPr>
+              <ns1:t xml:space="preserve">Alert administrator / restore approved state</ns1:t>
+            </ns1:r>
+            <ns1:endParaRPr lang="en-AU" sz="917"/>
+          </ns1:p>
+        </ns0:txBody>
+      </ns0:sp>
+      <ns0:sp>
+        <ns0:nvSpPr>
+          <ns0:cNvPr id="32" name="rect"/>
+          <ns0:cNvSpPr/>
+          <ns0:nvPr/>
+        </ns0:nvSpPr>
+        <ns0:spPr>
+          <ns1:xfrm>
+            <ns1:off x="4684080" y="1366454"/>
+            <ns1:ext cx="1673926" cy="524012"/>
+          </ns1:xfrm>
+          <ns1:prstGeom prst="roundRect">
+            <ns1:avLst>
+              <ns1:gd name="adj" fmla="val 16667"/>
+            </ns1:avLst>
+          </ns1:prstGeom>
+          <ns1:solidFill>
+            <ns1:srgbClr val="20231F"/>
+          </ns1:solidFill>
+          <ns1:ln w="8734" cap="flat">
+            <ns1:solidFill>
+              <ns1:srgbClr val="20231F"/>
+            </ns1:solidFill>
+            <ns1:round/>
+          </ns1:ln>
+        </ns0:spPr>
+      </ns0:sp>
+      <ns0:sp>
+        <ns0:nvSpPr>
+          <ns0:cNvPr id="33" name="Administrator"/>
+          <ns0:cNvSpPr txBox="1"/>
+          <ns0:nvPr/>
+        </ns0:nvSpPr>
+        <ns0:spPr>
+          <ns1:xfrm>
+            <ns1:off x="5063843" y="1447632"/>
+            <ns1:ext cx="975360" cy="236220"/>
+          </ns1:xfrm>
+          <ns1:prstGeom prst="rect">
+            <ns1:avLst/>
+          </ns1:prstGeom>
+          <ns1:noFill/>
+          <ns1:ln w="7620" cap="flat">
+            <ns1:noFill/>
+            <ns1:round/>
+          </ns1:ln>
+        </ns0:spPr>
+        <ns0:txBody>
+          <ns1:bodyPr wrap="none" lIns="0" rIns="0" tIns="0" bIns="0" anchor="t" rtlCol="0">
+            <ns1:noAutofit/>
+          </ns1:bodyPr>
+          <ns1:lstStyle/>
+          <ns1:p>
+            <ns1:pPr marL="0" indent="0" algn="l" fontAlgn="base">
+              <ns1:lnSpc>
+                <ns1:spcPts val="1089"/>
+              </ns1:lnSpc>
+              <ns1:spcBef>
+                <ns1:spcPts val="0"/>
+              </ns1:spcBef>
+              <ns1:spcAft>
+                <ns1:spcPts val="0"/>
+              </ns1:spcAft>
+              <ns1:buNone/>
+            </ns1:pPr>
+            <ns1:r>
+              <ns1:rPr lang="en-AU" sz="1089" b="0" spc="0" dirty="0">
+                <ns1:solidFill>
+                  <ns1:srgbClr val="F4F1E9"/>
+                </ns1:solidFill>
+                <ns1:latin typeface="Space Grotesk"/>
+                <ns1:ea typeface="Space Grotesk"/>
+                <ns1:cs typeface="Space Grotesk"/>
+              </ns1:rPr>
+              <ns1:t xml:space="preserve">Administrator</ns1:t>
+            </ns1:r>
+            <ns1:endParaRPr lang="en-AU" sz="1089"/>
+          </ns1:p>
+        </ns0:txBody>
+      </ns0:sp>
+      <ns0:sp>
+        <ns0:nvSpPr>
+          <ns0:cNvPr id="34" name="Approve / restore"/>
+          <ns0:cNvSpPr txBox="1"/>
+          <ns0:nvPr/>
+        </ns0:nvSpPr>
+        <ns0:spPr>
+          <ns1:xfrm>
+            <ns1:off x="5063843" y="1652783"/>
+            <ns1:ext cx="975360" cy="198120"/>
+          </ns1:xfrm>
+          <ns1:prstGeom prst="rect">
+            <ns1:avLst/>
+          </ns1:prstGeom>
+          <ns1:noFill/>
+          <ns1:ln w="7620" cap="flat">
+            <ns1:noFill/>
+            <ns1:round/>
+          </ns1:ln>
+        </ns0:spPr>
+        <ns0:txBody>
+          <ns1:bodyPr wrap="none" lIns="0" rIns="0" tIns="0" bIns="0" anchor="t" rtlCol="0">
+            <ns1:noAutofit/>
+          </ns1:bodyPr>
+          <ns1:lstStyle/>
+          <ns1:p>
+            <ns1:pPr marL="0" indent="0" algn="l" fontAlgn="base">
+              <ns1:lnSpc>
+                <ns1:spcPts val="860"/>
+              </ns1:lnSpc>
+              <ns1:spcBef>
+                <ns1:spcPts val="0"/>
+              </ns1:spcBef>
+              <ns1:spcAft>
+                <ns1:spcPts val="0"/>
+              </ns1:spcAft>
+              <ns1:buNone/>
+            </ns1:pPr>
+            <ns1:r>
+              <ns1:rPr lang="en-AU" sz="860" b="0" spc="0" dirty="0">
+                <ns1:solidFill>
+                  <ns1:srgbClr val="DADBD1"/>
+                </ns1:solidFill>
+                <ns1:latin typeface="Space Grotesk"/>
+                <ns1:ea typeface="Space Grotesk"/>
+                <ns1:cs typeface="Space Grotesk"/>
+              </ns1:rPr>
+              <ns1:t xml:space="preserve">Approve / restore</ns1:t>
+            </ns1:r>
+            <ns1:endParaRPr lang="en-AU" sz="860"/>
+          </ns1:p>
+        </ns0:txBody>
+      </ns0:sp>
+      <ns0:sp>
+        <ns0:nvSpPr>
+          <ns0:cNvPr id="35" name="rect"/>
+          <ns0:cNvSpPr/>
+          <ns0:nvPr/>
+        </ns0:nvSpPr>
+        <ns0:spPr>
+          <ns1:xfrm>
+            <ns1:off x="768548" y="2938489"/>
+            <ns1:ext cx="1426476" cy="1077135"/>
+          </ns1:xfrm>
+          <ns1:prstGeom prst="roundRect">
+            <ns1:avLst>
+              <ns1:gd name="adj" fmla="val 8108"/>
+            </ns1:avLst>
+          </ns1:prstGeom>
+          <ns1:solidFill>
+            <ns1:srgbClr val="F4F1E9"/>
+          </ns1:solidFill>
+          <ns1:ln w="8734" cap="flat">
+            <ns1:solidFill>
+              <ns1:srgbClr val="C43E2D"/>
+            </ns1:solidFill>
+            <ns1:round/>
+          </ns1:ln>
+        </ns0:spPr>
+      </ns0:sp>
+      <ns0:sp>
+        <ns0:nvSpPr>
+          <ns0:cNvPr id="36" name="Device parameters"/>
+          <ns0:cNvSpPr txBox="1"/>
+          <ns0:nvPr/>
+        </ns0:nvSpPr>
+        <ns0:spPr>
+          <ns1:xfrm>
+            <ns1:off x="899551" y="3012731"/>
+            <ns1:ext cx="1242060" cy="228600"/>
+          </ns1:xfrm>
+          <ns1:prstGeom prst="rect">
+            <ns1:avLst/>
+          </ns1:prstGeom>
+          <ns1:noFill/>
+          <ns1:ln w="7620" cap="flat">
+            <ns1:noFill/>
+            <ns1:round/>
+          </ns1:ln>
+        </ns0:spPr>
+        <ns0:txBody>
+          <ns1:bodyPr wrap="none" lIns="0" rIns="0" tIns="0" bIns="0" anchor="t" rtlCol="0">
+            <ns1:noAutofit/>
+          </ns1:bodyPr>
+          <ns1:lstStyle/>
+          <ns1:p>
+            <ns1:pPr marL="0" indent="0" algn="l" fontAlgn="base">
+              <ns1:lnSpc>
+                <ns1:spcPts val="1032"/>
+              </ns1:lnSpc>
+              <ns1:spcBef>
+                <ns1:spcPts val="0"/>
+              </ns1:spcBef>
+              <ns1:spcAft>
+                <ns1:spcPts val="0"/>
+              </ns1:spcAft>
+              <ns1:buNone/>
+            </ns1:pPr>
+            <ns1:r>
+              <ns1:rPr lang="en-AU" sz="1032" b="0" spc="0" dirty="0">
+                <ns1:solidFill>
+                  <ns1:srgbClr val="20231F"/>
+                </ns1:solidFill>
+                <ns1:latin typeface="Space Grotesk"/>
+                <ns1:ea typeface="Space Grotesk"/>
+                <ns1:cs typeface="Space Grotesk"/>
+              </ns1:rPr>
+              <ns1:t xml:space="preserve">Device parameters</ns1:t>
+            </ns1:r>
+            <ns1:endParaRPr lang="en-AU" sz="1032"/>
+          </ns1:p>
+        </ns0:txBody>
+      </ns0:sp>
+      <ns0:sp>
+        <ns0:nvSpPr>
+          <ns0:cNvPr id="37" name="Hardware"/>
+          <ns0:cNvSpPr txBox="1"/>
+          <ns0:nvPr/>
+        </ns0:nvSpPr>
+        <ns0:spPr>
+          <ns1:xfrm>
+            <ns1:off x="899551" y="3224134"/>
+            <ns1:ext cx="624840" cy="220980"/>
+          </ns1:xfrm>
+          <ns1:prstGeom prst="rect">
+            <ns1:avLst/>
+          </ns1:prstGeom>
+          <ns1:noFill/>
+          <ns1:ln w="7620" cap="flat">
+            <ns1:noFill/>
+            <ns1:round/>
+          </ns1:ln>
+        </ns0:spPr>
+        <ns0:txBody>
+          <ns1:bodyPr wrap="none" lIns="0" rIns="0" tIns="0" bIns="0" anchor="t" rtlCol="0">
+            <ns1:noAutofit/>
+          </ns1:bodyPr>
+          <ns1:lstStyle/>
+          <ns1:p>
+            <ns1:pPr marL="0" indent="0" algn="l" fontAlgn="base">
+              <ns1:lnSpc>
+                <ns1:spcPts val="974"/>
+              </ns1:lnSpc>
+              <ns1:spcBef>
+                <ns1:spcPts val="0"/>
+              </ns1:spcBef>
+              <ns1:spcAft>
+                <ns1:spcPts val="0"/>
+              </ns1:spcAft>
+              <ns1:buNone/>
+            </ns1:pPr>
+            <ns1:r>
+              <ns1:rPr lang="en-AU" sz="974" b="0" spc="0" dirty="0">
+                <ns1:solidFill>
+                  <ns1:srgbClr val="20231F"/>
+                </ns1:solidFill>
+                <ns1:latin typeface="Space Grotesk"/>
+                <ns1:ea typeface="Space Grotesk"/>
+                <ns1:cs typeface="Space Grotesk"/>
+              </ns1:rPr>
+              <ns1:t xml:space="preserve">Hardware</ns1:t>
+            </ns1:r>
+            <ns1:endParaRPr lang="en-AU" sz="974"/>
+          </ns1:p>
+        </ns0:txBody>
+      </ns0:sp>
+      <ns0:sp>
+        <ns0:nvSpPr>
+          <ns0:cNvPr id="38" name="Software"/>
+          <ns0:cNvSpPr txBox="1"/>
+          <ns0:nvPr/>
+        </ns0:nvSpPr>
+        <ns0:spPr>
+          <ns1:xfrm>
+            <ns1:off x="899551" y="3391526"/>
+            <ns1:ext cx="609600" cy="220980"/>
+          </ns1:xfrm>
+          <ns1:prstGeom prst="rect">
+            <ns1:avLst/>
+          </ns1:prstGeom>
+          <ns1:noFill/>
+          <ns1:ln w="7620" cap="flat">
+            <ns1:noFill/>
+            <ns1:round/>
+          </ns1:ln>
+        </ns0:spPr>
+        <ns0:txBody>
+          <ns1:bodyPr wrap="none" lIns="0" rIns="0" tIns="0" bIns="0" anchor="t" rtlCol="0">
+            <ns1:noAutofit/>
+          </ns1:bodyPr>
+          <ns1:lstStyle/>
+          <ns1:p>
+            <ns1:pPr marL="0" indent="0" algn="l" fontAlgn="base">
+              <ns1:lnSpc>
+                <ns1:spcPts val="974"/>
+              </ns1:lnSpc>
+              <ns1:spcBef>
+                <ns1:spcPts val="0"/>
+              </ns1:spcBef>
+              <ns1:spcAft>
+                <ns1:spcPts val="0"/>
+              </ns1:spcAft>
+              <ns1:buNone/>
+            </ns1:pPr>
+            <ns1:r>
+              <ns1:rPr lang="en-AU" sz="974" b="0" spc="0" dirty="0">
+                <ns1:solidFill>
+                  <ns1:srgbClr val="20231F"/>
+                </ns1:solidFill>
+                <ns1:latin typeface="Space Grotesk"/>
+                <ns1:ea typeface="Space Grotesk"/>
+                <ns1:cs typeface="Space Grotesk"/>
+              </ns1:rPr>
+              <ns1:t xml:space="preserve">Software</ns1:t>
+            </ns1:r>
+            <ns1:endParaRPr lang="en-AU" sz="974"/>
+          </ns1:p>
+        </ns0:txBody>
+      </ns0:sp>
+      <ns0:sp>
+        <ns0:nvSpPr>
+          <ns0:cNvPr id="39" name="Network / config"/>
+          <ns0:cNvSpPr txBox="1"/>
+          <ns0:nvPr/>
+        </ns0:nvSpPr>
+        <ns0:spPr>
+          <ns1:xfrm>
+            <ns1:off x="899551" y="3558919"/>
+            <ns1:ext cx="1059180" cy="220980"/>
+          </ns1:xfrm>
+          <ns1:prstGeom prst="rect">
+            <ns1:avLst/>
+          </ns1:prstGeom>
+          <ns1:noFill/>
+          <ns1:ln w="7620" cap="flat">
+            <ns1:noFill/>
+            <ns1:round/>
+          </ns1:ln>
+        </ns0:spPr>
+        <ns0:txBody>
+          <ns1:bodyPr wrap="none" lIns="0" rIns="0" tIns="0" bIns="0" anchor="t" rtlCol="0">
+            <ns1:noAutofit/>
+          </ns1:bodyPr>
+          <ns1:lstStyle/>
+          <ns1:p>
+            <ns1:pPr marL="0" indent="0" algn="l" fontAlgn="base">
+              <ns1:lnSpc>
+                <ns1:spcPts val="974"/>
+              </ns1:lnSpc>
+              <ns1:spcBef>
+                <ns1:spcPts val="0"/>
+              </ns1:spcBef>
+              <ns1:spcAft>
+                <ns1:spcPts val="0"/>
+              </ns1:spcAft>
+              <ns1:buNone/>
+            </ns1:pPr>
+            <ns1:r>
+              <ns1:rPr lang="en-AU" sz="974" b="0" spc="0" dirty="0">
+                <ns1:solidFill>
+                  <ns1:srgbClr val="20231F"/>
+                </ns1:solidFill>
+                <ns1:latin typeface="Space Grotesk"/>
+                <ns1:ea typeface="Space Grotesk"/>
+                <ns1:cs typeface="Space Grotesk"/>
+              </ns1:rPr>
+              <ns1:t xml:space="preserve">Network / config</ns1:t>
+            </ns1:r>
+            <ns1:endParaRPr lang="en-AU" sz="974"/>
+          </ns1:p>
+        </ns0:txBody>
+      </ns0:sp>
+      <ns0:sp>
+        <ns0:nvSpPr>
+          <ns0:cNvPr id="40" name="Environment"/>
+          <ns0:cNvSpPr txBox="1"/>
+          <ns0:nvPr/>
+        </ns0:nvSpPr>
+        <ns0:spPr>
+          <ns1:xfrm>
+            <ns1:off x="899551" y="3726312"/>
+            <ns1:ext cx="815340" cy="220980"/>
+          </ns1:xfrm>
+          <ns1:prstGeom prst="rect">
+            <ns1:avLst/>
+          </ns1:prstGeom>
+          <ns1:noFill/>
+          <ns1:ln w="7620" cap="flat">
+            <ns1:noFill/>
+            <ns1:round/>
+          </ns1:ln>
+        </ns0:spPr>
+        <ns0:txBody>
+          <ns1:bodyPr wrap="none" lIns="0" rIns="0" tIns="0" bIns="0" anchor="t" rtlCol="0">
+            <ns1:noAutofit/>
+          </ns1:bodyPr>
+          <ns1:lstStyle/>
+          <ns1:p>
+            <ns1:pPr marL="0" indent="0" algn="l" fontAlgn="base">
+              <ns1:lnSpc>
+                <ns1:spcPts val="974"/>
+              </ns1:lnSpc>
+              <ns1:spcBef>
+                <ns1:spcPts val="0"/>
+              </ns1:spcBef>
+              <ns1:spcAft>
+                <ns1:spcPts val="0"/>
+              </ns1:spcAft>
+              <ns1:buNone/>
+            </ns1:pPr>
+            <ns1:r>
+              <ns1:rPr lang="en-AU" sz="974" b="0" spc="0" dirty="0">
+                <ns1:solidFill>
+                  <ns1:srgbClr val="20231F"/>
+                </ns1:solidFill>
+                <ns1:latin typeface="Space Grotesk"/>
+                <ns1:ea typeface="Space Grotesk"/>
+                <ns1:cs typeface="Space Grotesk"/>
+              </ns1:rPr>
+              <ns1:t xml:space="preserve">Environment</ns1:t>
+            </ns1:r>
+            <ns1:endParaRPr lang="en-AU" sz="974"/>
+          </ns1:p>
+        </ns0:txBody>
+      </ns0:sp>
+      <ns0:sp>
+        <ns0:nvSpPr>
+          <ns0:cNvPr id="41" name="circle"/>
+          <ns0:cNvSpPr/>
+          <ns0:nvPr/>
+        </ns0:nvSpPr>
+        <ns0:spPr>
+          <ns1:xfrm>
+            <ns1:off x="2042187" y="3280552"/>
+            <ns1:ext cx="43668" cy="43668"/>
+          </ns1:xfrm>
+          <ns1:prstGeom prst="ellipse">
+            <ns1:avLst/>
+          </ns1:prstGeom>
+          <ns1:solidFill>
+            <ns1:srgbClr val="214BE0"/>
+          </ns1:solidFill>
+          <ns1:ln w="7278" cap="flat">
+            <ns1:noFill/>
+            <ns1:round/>
+          </ns1:ln>
+        </ns0:spPr>
+      </ns0:sp>
+      <ns0:sp>
+        <ns0:nvSpPr>
+          <ns0:cNvPr id="42" name="circle"/>
+          <ns0:cNvSpPr/>
+          <ns0:nvPr/>
+        </ns0:nvSpPr>
+        <ns0:spPr>
+          <ns1:xfrm>
+            <ns1:off x="2042187" y="3447945"/>
+            <ns1:ext cx="43668" cy="43668"/>
+          </ns1:xfrm>
+          <ns1:prstGeom prst="ellipse">
+            <ns1:avLst/>
+          </ns1:prstGeom>
+          <ns1:solidFill>
+            <ns1:srgbClr val="214BE0"/>
+          </ns1:solidFill>
+          <ns1:ln w="7278" cap="flat">
+            <ns1:noFill/>
+            <ns1:round/>
+          </ns1:ln>
+        </ns0:spPr>
+      </ns0:sp>
+      <ns0:sp>
+        <ns0:nvSpPr>
+          <ns0:cNvPr id="43" name="circle"/>
+          <ns0:cNvSpPr/>
+          <ns0:nvPr/>
+        </ns0:nvSpPr>
+        <ns0:spPr>
+          <ns1:xfrm>
+            <ns1:off x="2042187" y="3615337"/>
+            <ns1:ext cx="43668" cy="43668"/>
+          </ns1:xfrm>
+          <ns1:prstGeom prst="ellipse">
+            <ns1:avLst/>
+          </ns1:prstGeom>
+          <ns1:solidFill>
+            <ns1:srgbClr val="214BE0"/>
+          </ns1:solidFill>
+          <ns1:ln w="7278" cap="flat">
+            <ns1:noFill/>
+            <ns1:round/>
+          </ns1:ln>
+        </ns0:spPr>
+      </ns0:sp>
+      <ns0:sp>
+        <ns0:nvSpPr>
+          <ns0:cNvPr id="44" name="circle"/>
+          <ns0:cNvSpPr/>
+          <ns0:nvPr/>
+        </ns0:nvSpPr>
+        <ns0:spPr>
+          <ns1:xfrm>
+            <ns1:off x="2042187" y="3782730"/>
+            <ns1:ext cx="43668" cy="43668"/>
+          </ns1:xfrm>
+          <ns1:prstGeom prst="ellipse">
+            <ns1:avLst/>
+          </ns1:prstGeom>
+          <ns1:solidFill>
+            <ns1:srgbClr val="214BE0"/>
+          </ns1:solidFill>
+          <ns1:ln w="7278" cap="flat">
+            <ns1:noFill/>
+            <ns1:round/>
+          </ns1:ln>
+        </ns0:spPr>
+      </ns0:sp>
+      <ns0:sp>
+        <ns0:nvSpPr>
+          <ns0:cNvPr id="45" name="circle"/>
+          <ns0:cNvSpPr/>
+          <ns0:nvPr/>
+        </ns0:nvSpPr>
+        <ns0:spPr>
+          <ns1:xfrm>
+            <ns1:off x="2762704" y="3033102"/>
+            <ns1:ext cx="902465" cy="902465"/>
+          </ns1:xfrm>
+          <ns1:prstGeom prst="ellipse">
+            <ns1:avLst/>
+          </ns1:prstGeom>
+          <ns1:solidFill>
+            <ns1:srgbClr val="C43E2D"/>
+          </ns1:solidFill>
+          <ns1:ln w="7278" cap="flat">
+            <ns1:noFill/>
+            <ns1:round/>
+          </ns1:ln>
+        </ns0:spPr>
+      </ns0:sp>
+      <ns0:sp>
+        <ns0:nvSpPr>
+          <ns0:cNvPr id="46" name="circle"/>
+          <ns0:cNvSpPr/>
+          <ns0:nvPr/>
+        </ns0:nvSpPr>
+        <ns0:spPr>
+          <ns1:xfrm>
+            <ns1:off x="2704480" y="2974879"/>
+            <ns1:ext cx="1018912" cy="1018912"/>
+          </ns1:xfrm>
+          <ns1:prstGeom prst="ellipse">
+            <ns1:avLst/>
+          </ns1:prstGeom>
+          <ns1:noFill/>
+          <ns1:ln w="7278" cap="flat">
+            <ns1:solidFill>
+              <ns1:srgbClr val="C43E2D">
+                <ns1:alpha val="55000"/>
+              </ns1:srgbClr>
+            </ns1:solidFill>
+            <ns1:round/>
+          </ns1:ln>
+        </ns0:spPr>
+      </ns0:sp>
+      <ns0:sp>
+        <ns0:nvSpPr>
+          <ns0:cNvPr id="47" name="SHA-256"/>
+          <ns0:cNvSpPr txBox="1"/>
+          <ns0:nvPr/>
+        </ns0:nvSpPr>
+        <ns0:spPr>
+          <ns1:xfrm>
+            <ns1:off x="2867226" y="3265749"/>
+            <ns1:ext cx="754380" cy="274320"/>
+          </ns1:xfrm>
+          <ns1:prstGeom prst="rect">
+            <ns1:avLst/>
+          </ns1:prstGeom>
+          <ns1:noFill/>
+          <ns1:ln w="7620" cap="flat">
+            <ns1:noFill/>
+            <ns1:round/>
+          </ns1:ln>
+        </ns0:spPr>
+        <ns0:txBody>
+          <ns1:bodyPr wrap="none" lIns="0" rIns="0" tIns="0" bIns="0" anchor="t" rtlCol="0">
+            <ns1:noAutofit/>
+          </ns1:bodyPr>
+          <ns1:lstStyle/>
+          <ns1:p>
+            <ns1:pPr marL="0" indent="0" algn="l" fontAlgn="base">
+              <ns1:lnSpc>
+                <ns1:spcPts val="1318"/>
+              </ns1:lnSpc>
+              <ns1:spcBef>
+                <ns1:spcPts val="0"/>
+              </ns1:spcBef>
+              <ns1:spcAft>
+                <ns1:spcPts val="0"/>
+              </ns1:spcAft>
+              <ns1:buNone/>
+            </ns1:pPr>
+            <ns1:r>
+              <ns1:rPr lang="en-AU" sz="1318" b="1" spc="0" dirty="0">
+                <ns1:solidFill>
+                  <ns1:srgbClr val="F4F1E9"/>
+                </ns1:solidFill>
+                <ns1:latin typeface="Space Grotesk"/>
+                <ns1:ea typeface="Space Grotesk"/>
+                <ns1:cs typeface="Space Grotesk"/>
+              </ns1:rPr>
+              <ns1:t xml:space="preserve">SHA-256</ns1:t>
+            </ns1:r>
+            <ns1:endParaRPr lang="en-AU" sz="1318"/>
+          </ns1:p>
+        </ns0:txBody>
+      </ns0:sp>
+      <ns0:sp>
+        <ns0:nvSpPr>
+          <ns0:cNvPr id="48" name="I2Map generator"/>
+          <ns0:cNvSpPr txBox="1"/>
+          <ns0:nvPr/>
+        </ns0:nvSpPr>
+        <ns0:spPr>
+          <ns1:xfrm>
+            <ns1:off x="2802456" y="3501722"/>
+            <ns1:ext cx="883920" cy="190500"/>
+          </ns1:xfrm>
+          <ns1:prstGeom prst="rect">
+            <ns1:avLst/>
+          </ns1:prstGeom>
+          <ns1:noFill/>
+          <ns1:ln w="7620" cap="flat">
+            <ns1:noFill/>
+            <ns1:round/>
+          </ns1:ln>
+        </ns0:spPr>
+        <ns0:txBody>
+          <ns1:bodyPr wrap="none" lIns="0" rIns="0" tIns="0" bIns="0" anchor="t" rtlCol="0">
+            <ns1:noAutofit/>
+          </ns1:bodyPr>
+          <ns1:lstStyle/>
+          <ns1:p>
+            <ns1:pPr marL="0" indent="0" algn="l" fontAlgn="base">
+              <ns1:lnSpc>
+                <ns1:spcPts val="802"/>
+              </ns1:lnSpc>
+              <ns1:spcBef>
+                <ns1:spcPts val="0"/>
+              </ns1:spcBef>
+              <ns1:spcAft>
+                <ns1:spcPts val="0"/>
+              </ns1:spcAft>
+              <ns1:buNone/>
+            </ns1:pPr>
+            <ns1:r>
+              <ns1:rPr lang="en-AU" sz="802" b="0" spc="0" dirty="0">
+                <ns1:solidFill>
+                  <ns1:srgbClr val="F4F1E9"/>
+                </ns1:solidFill>
+                <ns1:latin typeface="Space Grotesk"/>
+                <ns1:ea typeface="Space Grotesk"/>
+                <ns1:cs typeface="Space Grotesk"/>
+              </ns1:rPr>
+              <ns1:t xml:space="preserve">I2Map generator</ns1:t>
+            </ns1:r>
+            <ns1:endParaRPr lang="en-AU" sz="802"/>
+          </ns1:p>
+        </ns0:txBody>
+      </ns0:sp>
+      <ns0:sp>
+        <ns0:nvSpPr>
+          <ns0:cNvPr id="49" name="Parameters → digest"/>
+          <ns0:cNvSpPr txBox="1"/>
+          <ns0:nvPr/>
+        </ns0:nvSpPr>
+        <ns0:spPr>
+          <ns1:xfrm>
+            <ns1:off x="2600526" y="4031985"/>
+            <ns1:ext cx="1287780" cy="220980"/>
+          </ns1:xfrm>
+          <ns1:prstGeom prst="rect">
+            <ns1:avLst/>
+          </ns1:prstGeom>
+          <ns1:noFill/>
+          <ns1:ln w="7620" cap="flat">
+            <ns1:noFill/>
+            <ns1:round/>
+          </ns1:ln>
+        </ns0:spPr>
+        <ns0:txBody>
+          <ns1:bodyPr wrap="none" lIns="0" rIns="0" tIns="0" bIns="0" anchor="t" rtlCol="0">
+            <ns1:noAutofit/>
+          </ns1:bodyPr>
+          <ns1:lstStyle/>
+          <ns1:p>
+            <ns1:pPr marL="0" indent="0" algn="l" fontAlgn="base">
+              <ns1:lnSpc>
+                <ns1:spcPts val="974"/>
+              </ns1:lnSpc>
+              <ns1:spcBef>
+                <ns1:spcPts val="0"/>
+              </ns1:spcBef>
+              <ns1:spcAft>
+                <ns1:spcPts val="0"/>
+              </ns1:spcAft>
+              <ns1:buNone/>
+            </ns1:pPr>
+            <ns1:r>
+              <ns1:rPr lang="en-AU" sz="974" b="0" spc="0" dirty="0">
+                <ns1:solidFill>
+                  <ns1:srgbClr val="60645B"/>
+                </ns1:solidFill>
+                <ns1:latin typeface="Space Grotesk"/>
+                <ns1:ea typeface="Space Grotesk"/>
+                <ns1:cs typeface="Space Grotesk"/>
+              </ns1:rPr>
+              <ns1:t xml:space="preserve">Parameters → digest</ns1:t>
+            </ns1:r>
+            <ns1:endParaRPr lang="en-AU" sz="974"/>
+          </ns1:p>
+        </ns0:txBody>
+      </ns0:sp>
+      <ns0:sp>
+        <ns0:nvSpPr>
+          <ns0:cNvPr id="50" name="rect"/>
+          <ns0:cNvSpPr/>
+          <ns0:nvPr/>
+        </ns0:nvSpPr>
+        <ns0:spPr>
+          <ns1:xfrm>
+            <ns1:off x="2544365" y="4233962"/>
+            <ns1:ext cx="1346419" cy="349341"/>
+          </ns1:xfrm>
+          <ns1:prstGeom prst="roundRect">
+            <ns1:avLst>
+              <ns1:gd name="adj" fmla="val 18750"/>
+            </ns1:avLst>
+          </ns1:prstGeom>
+          <ns1:solidFill>
+            <ns1:srgbClr val="F4F1E9"/>
+          </ns1:solidFill>
+          <ns1:ln w="8734" cap="flat">
+            <ns1:solidFill>
+              <ns1:srgbClr val="08766B"/>
+            </ns1:solidFill>
+            <ns1:round/>
+          </ns1:ln>
+        </ns0:spPr>
+      </ns0:sp>
+      <ns0:sp>
+        <ns0:nvSpPr>
+          <ns0:cNvPr id="51" name="Sensor data"/>
+          <ns0:cNvSpPr txBox="1"/>
+          <ns0:nvPr/>
+        </ns0:nvSpPr>
+        <ns0:spPr>
+          <ns1:xfrm>
+            <ns1:off x="2863416" y="4330381"/>
+            <ns1:ext cx="762000" cy="220980"/>
+          </ns1:xfrm>
+          <ns1:prstGeom prst="rect">
+            <ns1:avLst/>
+          </ns1:prstGeom>
+          <ns1:noFill/>
+          <ns1:ln w="7620" cap="flat">
+            <ns1:noFill/>
+            <ns1:round/>
+          </ns1:ln>
+        </ns0:spPr>
+        <ns0:txBody>
+          <ns1:bodyPr wrap="none" lIns="0" rIns="0" tIns="0" bIns="0" anchor="t" rtlCol="0">
+            <ns1:noAutofit/>
+          </ns1:bodyPr>
+          <ns1:lstStyle/>
+          <ns1:p>
+            <ns1:pPr marL="0" indent="0" algn="l" fontAlgn="base">
+              <ns1:lnSpc>
+                <ns1:spcPts val="974"/>
+              </ns1:lnSpc>
+              <ns1:spcBef>
+                <ns1:spcPts val="0"/>
+              </ns1:spcBef>
+              <ns1:spcAft>
+                <ns1:spcPts val="0"/>
+              </ns1:spcAft>
+              <ns1:buNone/>
+            </ns1:pPr>
+            <ns1:r>
+              <ns1:rPr lang="en-AU" sz="974" b="0" spc="0" dirty="0">
+                <ns1:solidFill>
+                  <ns1:srgbClr val="08766B"/>
+                </ns1:solidFill>
+                <ns1:latin typeface="Space Grotesk"/>
+                <ns1:ea typeface="Space Grotesk"/>
+                <ns1:cs typeface="Space Grotesk"/>
+              </ns1:rPr>
+              <ns1:t xml:space="preserve">Sensor data</ns1:t>
+            </ns1:r>
+            <ns1:endParaRPr lang="en-AU" sz="974"/>
+          </ns1:p>
+        </ns0:txBody>
+      </ns0:sp>
+      <ns0:sp>
+        <ns0:nvSpPr>
+          <ns0:cNvPr id="52" name="rect"/>
+          <ns0:cNvSpPr/>
+          <ns0:nvPr/>
+        </ns0:nvSpPr>
+        <ns0:spPr>
+          <ns1:xfrm>
+            <ns1:off x="4247403" y="3047658"/>
+            <ns1:ext cx="1193582" cy="946132"/>
+          </ns1:xfrm>
+          <ns1:prstGeom prst="roundRect">
+            <ns1:avLst>
+              <ns1:gd name="adj" fmla="val 9231"/>
+            </ns1:avLst>
+          </ns1:prstGeom>
+          <ns1:solidFill>
+            <ns1:srgbClr val="E6EBFC"/>
+          </ns1:solidFill>
+          <ns1:ln w="8734" cap="flat">
+            <ns1:solidFill>
+              <ns1:srgbClr val="214BE0"/>
+            </ns1:solidFill>
+            <ns1:round/>
+          </ns1:ln>
+        </ns0:spPr>
+      </ns0:sp>
+      <ns0:sp>
+        <ns0:nvSpPr>
+          <ns0:cNvPr id="53" name="CyberScope"/>
+          <ns0:cNvSpPr txBox="1"/>
+          <ns0:nvPr/>
+        </ns0:nvSpPr>
+        <ns0:spPr>
+          <ns1:xfrm>
+            <ns1:off x="4428905" y="3128836"/>
+            <ns1:ext cx="891540" cy="236220"/>
+          </ns1:xfrm>
+          <ns1:prstGeom prst="rect">
+            <ns1:avLst/>
+          </ns1:prstGeom>
+          <ns1:noFill/>
+          <ns1:ln w="7620" cap="flat">
+            <ns1:noFill/>
+            <ns1:round/>
+          </ns1:ln>
+        </ns0:spPr>
+        <ns0:txBody>
+          <ns1:bodyPr wrap="none" lIns="0" rIns="0" tIns="0" bIns="0" anchor="t" rtlCol="0">
+            <ns1:noAutofit/>
+          </ns1:bodyPr>
+          <ns1:lstStyle/>
+          <ns1:p>
+            <ns1:pPr marL="0" indent="0" algn="l" fontAlgn="base">
+              <ns1:lnSpc>
+                <ns1:spcPts val="1089"/>
+              </ns1:lnSpc>
+              <ns1:spcBef>
+                <ns1:spcPts val="0"/>
+              </ns1:spcBef>
+              <ns1:spcAft>
+                <ns1:spcPts val="0"/>
+              </ns1:spcAft>
+              <ns1:buNone/>
+            </ns1:pPr>
+            <ns1:r>
+              <ns1:rPr lang="en-AU" sz="1089" b="0" spc="0" dirty="0">
+                <ns1:solidFill>
+                  <ns1:srgbClr val="20231F"/>
+                </ns1:solidFill>
+                <ns1:latin typeface="Space Grotesk"/>
+                <ns1:ea typeface="Space Grotesk"/>
+                <ns1:cs typeface="Space Grotesk"/>
+              </ns1:rPr>
+              <ns1:t xml:space="preserve">CyberScope</ns1:t>
+            </ns1:r>
+            <ns1:endParaRPr lang="en-AU" sz="1089"/>
+          </ns1:p>
+        </ns0:txBody>
+      </ns0:sp>
+      <ns0:sp>
+        <ns0:nvSpPr>
+          <ns0:cNvPr id="54" name="attestation"/>
+          <ns0:cNvSpPr txBox="1"/>
+          <ns0:nvPr/>
+        </ns0:nvSpPr>
+        <ns0:spPr>
+          <ns1:xfrm>
+            <ns1:off x="4474625" y="3310785"/>
+            <ns1:ext cx="800100" cy="236220"/>
+          </ns1:xfrm>
+          <ns1:prstGeom prst="rect">
+            <ns1:avLst/>
+          </ns1:prstGeom>
+          <ns1:noFill/>
+          <ns1:ln w="7620" cap="flat">
+            <ns1:noFill/>
+            <ns1:round/>
+          </ns1:ln>
+        </ns0:spPr>
+        <ns0:txBody>
+          <ns1:bodyPr wrap="none" lIns="0" rIns="0" tIns="0" bIns="0" anchor="t" rtlCol="0">
+            <ns1:noAutofit/>
+          </ns1:bodyPr>
+          <ns1:lstStyle/>
+          <ns1:p>
+            <ns1:pPr marL="0" indent="0" algn="l" fontAlgn="base">
+              <ns1:lnSpc>
+                <ns1:spcPts val="1089"/>
+              </ns1:lnSpc>
+              <ns1:spcBef>
+                <ns1:spcPts val="0"/>
+              </ns1:spcBef>
+              <ns1:spcAft>
+                <ns1:spcPts val="0"/>
+              </ns1:spcAft>
+              <ns1:buNone/>
+            </ns1:pPr>
+            <ns1:r>
+              <ns1:rPr lang="en-AU" sz="1089" b="0" spc="0" dirty="0">
+                <ns1:solidFill>
+                  <ns1:srgbClr val="20231F"/>
+                </ns1:solidFill>
+                <ns1:latin typeface="Space Grotesk"/>
+                <ns1:ea typeface="Space Grotesk"/>
+                <ns1:cs typeface="Space Grotesk"/>
+              </ns1:rPr>
+              <ns1:t xml:space="preserve">attestation</ns1:t>
+            </ns1:r>
+            <ns1:endParaRPr lang="en-AU" sz="1089"/>
+          </ns1:p>
+        </ns0:txBody>
+      </ns0:sp>
+      <ns0:sp>
+        <ns0:nvSpPr>
+          <ns0:cNvPr id="55" name="agent"/>
+          <ns0:cNvSpPr txBox="1"/>
+          <ns0:nvPr/>
+        </ns0:nvSpPr>
+        <ns0:spPr>
+          <ns1:xfrm>
+            <ns1:off x="4646075" y="3492734"/>
+            <ns1:ext cx="457200" cy="236220"/>
+          </ns1:xfrm>
+          <ns1:prstGeom prst="rect">
+            <ns1:avLst/>
+          </ns1:prstGeom>
+          <ns1:noFill/>
+          <ns1:ln w="7620" cap="flat">
+            <ns1:noFill/>
+            <ns1:round/>
+          </ns1:ln>
+        </ns0:spPr>
+        <ns0:txBody>
+          <ns1:bodyPr wrap="none" lIns="0" rIns="0" tIns="0" bIns="0" anchor="t" rtlCol="0">
+            <ns1:noAutofit/>
+          </ns1:bodyPr>
+          <ns1:lstStyle/>
+          <ns1:p>
+            <ns1:pPr marL="0" indent="0" algn="l" fontAlgn="base">
+              <ns1:lnSpc>
+                <ns1:spcPts val="1089"/>
+              </ns1:lnSpc>
+              <ns1:spcBef>
+                <ns1:spcPts val="0"/>
+              </ns1:spcBef>
+              <ns1:spcAft>
+                <ns1:spcPts val="0"/>
+              </ns1:spcAft>
+              <ns1:buNone/>
+            </ns1:pPr>
+            <ns1:r>
+              <ns1:rPr lang="en-AU" sz="1089" b="0" spc="0" dirty="0">
+                <ns1:solidFill>
+                  <ns1:srgbClr val="20231F"/>
+                </ns1:solidFill>
+                <ns1:latin typeface="Space Grotesk"/>
+                <ns1:ea typeface="Space Grotesk"/>
+                <ns1:cs typeface="Space Grotesk"/>
+              </ns1:rPr>
+              <ns1:t xml:space="preserve">agent</ns1:t>
+            </ns1:r>
+            <ns1:endParaRPr lang="en-AU" sz="1089"/>
+          </ns1:p>
+        </ns0:txBody>
+      </ns0:sp>
+      <ns0:sp>
+        <ns0:nvSpPr>
+          <ns0:cNvPr id="56" name="Submit I2Map"/>
+          <ns0:cNvSpPr txBox="1"/>
+          <ns0:nvPr/>
+        </ns0:nvSpPr>
+        <ns0:spPr>
+          <ns1:xfrm>
+            <ns1:off x="4508915" y="3734616"/>
+            <ns1:ext cx="731520" cy="190500"/>
+          </ns1:xfrm>
+          <ns1:prstGeom prst="rect">
+            <ns1:avLst/>
+          </ns1:prstGeom>
+          <ns1:noFill/>
+          <ns1:ln w="7620" cap="flat">
+            <ns1:noFill/>
+            <ns1:round/>
+          </ns1:ln>
+        </ns0:spPr>
+        <ns0:txBody>
+          <ns1:bodyPr wrap="none" lIns="0" rIns="0" tIns="0" bIns="0" anchor="t" rtlCol="0">
+            <ns1:noAutofit/>
+          </ns1:bodyPr>
+          <ns1:lstStyle/>
+          <ns1:p>
+            <ns1:pPr marL="0" indent="0" algn="l" fontAlgn="base">
+              <ns1:lnSpc>
+                <ns1:spcPts val="802"/>
+              </ns1:lnSpc>
+              <ns1:spcBef>
+                <ns1:spcPts val="0"/>
+              </ns1:spcBef>
+              <ns1:spcAft>
+                <ns1:spcPts val="0"/>
+              </ns1:spcAft>
+              <ns1:buNone/>
+            </ns1:pPr>
+            <ns1:r>
+              <ns1:rPr lang="en-AU" sz="802" b="0" spc="0" dirty="0">
+                <ns1:solidFill>
+                  <ns1:srgbClr val="60645B"/>
+                </ns1:solidFill>
+                <ns1:latin typeface="Space Grotesk"/>
+                <ns1:ea typeface="Space Grotesk"/>
+                <ns1:cs typeface="Space Grotesk"/>
+              </ns1:rPr>
+              <ns1:t xml:space="preserve">Submit I2Map</ns1:t>
+            </ns1:r>
+            <ns1:endParaRPr lang="en-AU" sz="802"/>
+          </ns1:p>
+        </ns0:txBody>
+      </ns0:sp>
+      <ns0:sp>
+        <ns0:nvSpPr>
+          <ns0:cNvPr id="57" name="rect"/>
+          <ns0:cNvSpPr/>
+          <ns0:nvPr/>
+        </ns0:nvSpPr>
+        <ns0:spPr>
+          <ns1:xfrm>
+            <ns1:off x="6212447" y="2974879"/>
+            <ns1:ext cx="2197938" cy="1048023"/>
+          </ns1:xfrm>
+          <ns1:prstGeom prst="roundRect">
+            <ns1:avLst>
+              <ns1:gd name="adj" fmla="val 8333"/>
+            </ns1:avLst>
+          </ns1:prstGeom>
+          <ns1:solidFill>
+            <ns1:srgbClr val="F4F1E9"/>
+          </ns1:solidFill>
+          <ns1:ln w="8734" cap="flat">
+            <ns1:solidFill>
+              <ns1:srgbClr val="C43E2D"/>
+            </ns1:solidFill>
+            <ns1:round/>
+          </ns1:ln>
+        </ns0:spPr>
+      </ns0:sp>
+      <ns0:sp>
+        <ns0:nvSpPr>
+          <ns0:cNvPr id="58" name="Verifier service"/>
+          <ns0:cNvSpPr txBox="1"/>
+          <ns0:nvPr/>
+        </ns0:nvSpPr>
+        <ns0:spPr>
+          <ns1:xfrm>
+            <ns1:off x="6804686" y="3070613"/>
+            <ns1:ext cx="1074420" cy="236220"/>
+          </ns1:xfrm>
+          <ns1:prstGeom prst="rect">
+            <ns1:avLst/>
+          </ns1:prstGeom>
+          <ns1:noFill/>
+          <ns1:ln w="7620" cap="flat">
+            <ns1:noFill/>
+            <ns1:round/>
+          </ns1:ln>
+        </ns0:spPr>
+        <ns0:txBody>
+          <ns1:bodyPr wrap="none" lIns="0" rIns="0" tIns="0" bIns="0" anchor="t" rtlCol="0">
+            <ns1:noAutofit/>
+          </ns1:bodyPr>
+          <ns1:lstStyle/>
+          <ns1:p>
+            <ns1:pPr marL="0" indent="0" algn="l" fontAlgn="base">
+              <ns1:lnSpc>
+                <ns1:spcPts val="1089"/>
+              </ns1:lnSpc>
+              <ns1:spcBef>
+                <ns1:spcPts val="0"/>
+              </ns1:spcBef>
+              <ns1:spcAft>
+                <ns1:spcPts val="0"/>
+              </ns1:spcAft>
+              <ns1:buNone/>
+            </ns1:pPr>
+            <ns1:r>
+              <ns1:rPr lang="en-AU" sz="1089" b="0" spc="0" dirty="0">
+                <ns1:solidFill>
+                  <ns1:srgbClr val="20231F"/>
+                </ns1:solidFill>
+                <ns1:latin typeface="Space Grotesk"/>
+                <ns1:ea typeface="Space Grotesk"/>
+                <ns1:cs typeface="Space Grotesk"/>
+              </ns1:rPr>
+              <ns1:t xml:space="preserve">Verifier service</ns1:t>
+            </ns1:r>
+            <ns1:endParaRPr lang="en-AU" sz="1089"/>
+          </ns1:p>
+        </ns0:txBody>
+      </ns0:sp>
+      <ns0:sp>
+        <ns0:nvSpPr>
+          <ns0:cNvPr id="59" name="Compare runtime with baseline"/>
+          <ns0:cNvSpPr txBox="1"/>
+          <ns0:nvPr/>
+        </ns0:nvSpPr>
+        <ns0:spPr>
+          <ns1:xfrm>
+            <ns1:off x="6492266" y="3304875"/>
+            <ns1:ext cx="1699260" cy="198120"/>
+          </ns1:xfrm>
+          <ns1:prstGeom prst="rect">
+            <ns1:avLst/>
+          </ns1:prstGeom>
+          <ns1:noFill/>
+          <ns1:ln w="7620" cap="flat">
+            <ns1:noFill/>
+            <ns1:round/>
+          </ns1:ln>
+        </ns0:spPr>
+        <ns0:txBody>
+          <ns1:bodyPr wrap="none" lIns="0" rIns="0" tIns="0" bIns="0" anchor="t" rtlCol="0">
+            <ns1:noAutofit/>
+          </ns1:bodyPr>
+          <ns1:lstStyle/>
+          <ns1:p>
+            <ns1:pPr marL="0" indent="0" algn="l" fontAlgn="base">
+              <ns1:lnSpc>
+                <ns1:spcPts val="860"/>
+              </ns1:lnSpc>
+              <ns1:spcBef>
+                <ns1:spcPts val="0"/>
+              </ns1:spcBef>
+              <ns1:spcAft>
+                <ns1:spcPts val="0"/>
+              </ns1:spcAft>
+              <ns1:buNone/>
+            </ns1:pPr>
+            <ns1:r>
+              <ns1:rPr lang="en-AU" sz="860" b="0" spc="0" dirty="0">
+                <ns1:solidFill>
+                  <ns1:srgbClr val="60645B"/>
+                </ns1:solidFill>
+                <ns1:latin typeface="Space Grotesk"/>
+                <ns1:ea typeface="Space Grotesk"/>
+                <ns1:cs typeface="Space Grotesk"/>
+              </ns1:rPr>
+              <ns1:t xml:space="preserve">Compare runtime with baseline</ns1:t>
+            </ns1:r>
+            <ns1:endParaRPr lang="en-AU" sz="860"/>
+          </ns1:p>
+        </ns0:txBody>
+      </ns0:sp>
+      <ns0:sp>
+        <ns0:nvSpPr>
+          <ns0:cNvPr id="60" name="comparison-text"/>
+          <ns0:cNvSpPr txBox="1"/>
+          <ns0:nvPr/>
+        </ns0:nvSpPr>
+        <ns0:spPr>
+          <ns1:xfrm>
+            <ns1:off x="6435116" y="3616801"/>
+            <ns1:ext cx="1813560" cy="220980"/>
+          </ns1:xfrm>
+          <ns1:prstGeom prst="rect">
+            <ns1:avLst/>
+          </ns1:prstGeom>
+          <ns1:noFill/>
+          <ns1:ln w="7620" cap="flat">
+            <ns1:noFill/>
+            <ns1:round/>
+          </ns1:ln>
+        </ns0:spPr>
+        <ns0:txBody>
+          <ns1:bodyPr wrap="none" lIns="0" rIns="0" tIns="0" bIns="0" anchor="t" rtlCol="0">
+            <ns1:noAutofit/>
+          </ns1:bodyPr>
+          <ns1:lstStyle/>
+          <ns1:p>
+            <ns1:pPr marL="0" indent="0" algn="l" fontAlgn="base">
+              <ns1:lnSpc>
+                <ns1:spcPts val="1089"/>
+              </ns1:lnSpc>
+              <ns1:spcBef>
+                <ns1:spcPts val="0"/>
+              </ns1:spcBef>
+              <ns1:spcAft>
+                <ns1:spcPts val="0"/>
+              </ns1:spcAft>
+              <ns1:buNone/>
+            </ns1:pPr>
+            <ns1:r>
+              <ns1:rPr lang="en-AU" sz="1089" b="0" spc="0" dirty="0">
+                <ns1:solidFill>
+                  <ns1:srgbClr val="C43E2D"/>
+                </ns1:solidFill>
+                <ns1:latin typeface="Consolas"/>
+                <ns1:ea typeface="Consolas"/>
+                <ns1:cs typeface="Consolas"/>
+              </ns1:rPr>
+              <ns1:t xml:space="preserve">Runtime ≠ baseline</ns1:t>
+            </ns1:r>
+            <ns1:endParaRPr lang="en-AU" sz="1089"/>
+          </ns1:p>
+        </ns0:txBody>
+      </ns0:sp>
+      <ns0:sp>
+        <ns0:nvSpPr>
+          <ns0:cNvPr id="61" name="rect"/>
+          <ns0:cNvSpPr/>
+          <ns0:nvPr/>
+        </ns0:nvSpPr>
+        <ns0:spPr>
+          <ns1:xfrm>
+            <ns1:off x="9050844" y="2858432"/>
+            <ns1:ext cx="2197938" cy="509456"/>
+          </ns1:xfrm>
+          <ns1:prstGeom prst="roundRect">
+            <ns1:avLst>
+              <ns1:gd name="adj" fmla="val 17143"/>
+            </ns1:avLst>
+          </ns1:prstGeom>
+          <ns1:solidFill>
+            <ns1:srgbClr val="F4F1E9"/>
+          </ns1:solidFill>
+          <ns1:ln w="8734" cap="flat">
+            <ns1:solidFill>
+              <ns1:srgbClr val="214BE0"/>
+            </ns1:solidFill>
+            <ns1:round/>
+          </ns1:ln>
+        </ns0:spPr>
+      </ns0:sp>
+      <ns0:sp>
+        <ns0:nvSpPr>
+          <ns0:cNvPr id="62" name="Hash-storage contract"/>
+          <ns0:cNvSpPr txBox="1"/>
+          <ns0:nvPr/>
+        </ns0:nvSpPr>
+        <ns0:spPr>
+          <ns1:xfrm>
+            <ns1:off x="9380193" y="2925054"/>
+            <ns1:ext cx="1600200" cy="236220"/>
+          </ns1:xfrm>
+          <ns1:prstGeom prst="rect">
+            <ns1:avLst/>
+          </ns1:prstGeom>
+          <ns1:noFill/>
+          <ns1:ln w="7620" cap="flat">
+            <ns1:noFill/>
+            <ns1:round/>
+          </ns1:ln>
+        </ns0:spPr>
+        <ns0:txBody>
+          <ns1:bodyPr wrap="none" lIns="0" rIns="0" tIns="0" bIns="0" anchor="t" rtlCol="0">
+            <ns1:noAutofit/>
+          </ns1:bodyPr>
+          <ns1:lstStyle/>
+          <ns1:p>
+            <ns1:pPr marL="0" indent="0" algn="l" fontAlgn="base">
+              <ns1:lnSpc>
+                <ns1:spcPts val="1089"/>
+              </ns1:lnSpc>
+              <ns1:spcBef>
+                <ns1:spcPts val="0"/>
+              </ns1:spcBef>
+              <ns1:spcAft>
+                <ns1:spcPts val="0"/>
+              </ns1:spcAft>
+              <ns1:buNone/>
+            </ns1:pPr>
+            <ns1:r>
+              <ns1:rPr lang="en-AU" sz="1089" b="0" spc="0" dirty="0">
+                <ns1:solidFill>
+                  <ns1:srgbClr val="20231F"/>
+                </ns1:solidFill>
+                <ns1:latin typeface="Space Grotesk"/>
+                <ns1:ea typeface="Space Grotesk"/>
+                <ns1:cs typeface="Space Grotesk"/>
+              </ns1:rPr>
+              <ns1:t xml:space="preserve">Hash-storage contract</ns1:t>
+            </ns1:r>
+            <ns1:endParaRPr lang="en-AU" sz="1089"/>
+          </ns1:p>
+        </ns0:txBody>
+      </ns0:sp>
+      <ns0:sp>
+        <ns0:nvSpPr>
+          <ns0:cNvPr id="63" name="Private Ethereum · Solidity"/>
+          <ns0:cNvSpPr txBox="1"/>
+          <ns0:nvPr/>
+        </ns0:nvSpPr>
+        <ns0:spPr>
+          <ns1:xfrm>
+            <ns1:off x="9444963" y="3130205"/>
+            <ns1:ext cx="1470661" cy="198120"/>
+          </ns1:xfrm>
+          <ns1:prstGeom prst="rect">
+            <ns1:avLst/>
+          </ns1:prstGeom>
+          <ns1:noFill/>
+          <ns1:ln w="7620" cap="flat">
+            <ns1:noFill/>
+            <ns1:round/>
+          </ns1:ln>
+        </ns0:spPr>
+        <ns0:txBody>
+          <ns1:bodyPr wrap="none" lIns="0" rIns="0" tIns="0" bIns="0" anchor="t" rtlCol="0">
+            <ns1:noAutofit/>
+          </ns1:bodyPr>
+          <ns1:lstStyle/>
+          <ns1:p>
+            <ns1:pPr marL="0" indent="0" algn="l" fontAlgn="base">
+              <ns1:lnSpc>
+                <ns1:spcPts val="860"/>
+              </ns1:lnSpc>
+              <ns1:spcBef>
+                <ns1:spcPts val="0"/>
+              </ns1:spcBef>
+              <ns1:spcAft>
+                <ns1:spcPts val="0"/>
+              </ns1:spcAft>
+              <ns1:buNone/>
+            </ns1:pPr>
+            <ns1:r>
+              <ns1:rPr lang="en-AU" sz="860" b="0" spc="0" dirty="0">
+                <ns1:solidFill>
+                  <ns1:srgbClr val="60645B"/>
+                </ns1:solidFill>
+                <ns1:latin typeface="Space Grotesk"/>
+                <ns1:ea typeface="Space Grotesk"/>
+                <ns1:cs typeface="Space Grotesk"/>
+              </ns1:rPr>
+              <ns1:t xml:space="preserve">Private Ethereum · Solidity</ns1:t>
+            </ns1:r>
+            <ns1:endParaRPr lang="en-AU" sz="860"/>
+          </ns1:p>
+        </ns0:txBody>
+      </ns0:sp>
+      <ns0:sp>
+        <ns0:nvSpPr>
+          <ns0:cNvPr id="64" name="rect"/>
+          <ns0:cNvSpPr/>
+          <ns0:nvPr/>
+        </ns0:nvSpPr>
+        <ns0:spPr>
+          <ns1:xfrm>
+            <ns1:off x="9050844" y="3600782"/>
+            <ns1:ext cx="2197938" cy="407565"/>
+          </ns1:xfrm>
+          <ns1:prstGeom prst="roundRect">
+            <ns1:avLst>
+              <ns1:gd name="adj" fmla="val 16071"/>
+            </ns1:avLst>
+          </ns1:prstGeom>
+          <ns1:solidFill>
+            <ns1:srgbClr val="F4F1E9"/>
+          </ns1:solidFill>
+          <ns1:ln w="8734" cap="flat">
+            <ns1:solidFill>
+              <ns1:srgbClr val="214BE0"/>
+            </ns1:solidFill>
+            <ns1:round/>
+          </ns1:ln>
+        </ns0:spPr>
+      </ns0:sp>
+      <ns0:sp>
+        <ns0:nvSpPr>
+          <ns0:cNvPr id="65" name="Base I2Map"/>
+          <ns0:cNvSpPr txBox="1"/>
+          <ns0:nvPr/>
+        </ns0:nvSpPr>
+        <ns0:spPr>
+          <ns1:xfrm>
+            <ns1:off x="9167291" y="3711072"/>
+            <ns1:ext cx="838200" cy="236220"/>
+          </ns1:xfrm>
+          <ns1:prstGeom prst="rect">
+            <ns1:avLst/>
+          </ns1:prstGeom>
+          <ns1:noFill/>
+          <ns1:ln w="7620" cap="flat">
+            <ns1:noFill/>
+            <ns1:round/>
+          </ns1:ln>
+        </ns0:spPr>
+        <ns0:txBody>
+          <ns1:bodyPr wrap="none" lIns="0" rIns="0" tIns="0" bIns="0" anchor="t" rtlCol="0">
+            <ns1:noAutofit/>
+          </ns1:bodyPr>
+          <ns1:lstStyle/>
+          <ns1:p>
+            <ns1:pPr marL="0" indent="0" algn="l" fontAlgn="base">
+              <ns1:lnSpc>
+                <ns1:spcPts val="1089"/>
+              </ns1:lnSpc>
+              <ns1:spcBef>
+                <ns1:spcPts val="0"/>
+              </ns1:spcBef>
+              <ns1:spcAft>
+                <ns1:spcPts val="0"/>
+              </ns1:spcAft>
+              <ns1:buNone/>
+            </ns1:pPr>
+            <ns1:r>
+              <ns1:rPr lang="en-AU" sz="1089" b="0" spc="0" dirty="0">
+                <ns1:solidFill>
+                  <ns1:srgbClr val="20231F"/>
+                </ns1:solidFill>
+                <ns1:latin typeface="Space Grotesk"/>
+                <ns1:ea typeface="Space Grotesk"/>
+                <ns1:cs typeface="Space Grotesk"/>
+              </ns1:rPr>
+              <ns1:t xml:space="preserve">Base I2Map</ns1:t>
+            </ns1:r>
+            <ns1:endParaRPr lang="en-AU" sz="1089"/>
+          </ns1:p>
+        </ns0:txBody>
+      </ns0:sp>
+      <ns0:sp>
+        <ns0:nvSpPr>
+          <ns0:cNvPr id="66" name="baseline-digest"/>
+          <ns0:cNvSpPr txBox="1"/>
+          <ns0:nvPr/>
+        </ns0:nvSpPr>
+        <ns0:spPr>
+          <ns1:xfrm>
+            <ns1:off x="10409031" y="3718692"/>
+            <ns1:ext cx="784860" cy="220980"/>
+          </ns1:xfrm>
+          <ns1:prstGeom prst="rect">
+            <ns1:avLst/>
+          </ns1:prstGeom>
+          <ns1:noFill/>
+          <ns1:ln w="7620" cap="flat">
+            <ns1:noFill/>
+            <ns1:round/>
+          </ns1:ln>
+        </ns0:spPr>
+        <ns0:txBody>
+          <ns1:bodyPr wrap="none" lIns="0" rIns="0" tIns="0" bIns="0" anchor="t" rtlCol="0">
+            <ns1:noAutofit/>
+          </ns1:bodyPr>
+          <ns1:lstStyle/>
+          <ns1:p>
+            <ns1:pPr marL="0" indent="0" algn="l" fontAlgn="base">
+              <ns1:lnSpc>
+                <ns1:spcPts val="1089"/>
+              </ns1:lnSpc>
+              <ns1:spcBef>
+                <ns1:spcPts val="0"/>
+              </ns1:spcBef>
+              <ns1:spcAft>
+                <ns1:spcPts val="0"/>
+              </ns1:spcAft>
+              <ns1:buNone/>
+            </ns1:pPr>
+            <ns1:r>
+              <ns1:rPr lang="en-AU" sz="1089" b="0" spc="0" dirty="0">
+                <ns1:solidFill>
+                  <ns1:srgbClr val="214BE0"/>
+                </ns1:solidFill>
+                <ns1:latin typeface="Consolas"/>
+                <ns1:ea typeface="Consolas"/>
+                <ns1:cs typeface="Consolas"/>
+              </ns1:rPr>
+              <ns1:t xml:space="preserve">Unchanged</ns1:t>
+            </ns1:r>
+            <ns1:endParaRPr lang="en-AU" sz="1089"/>
+          </ns1:p>
+        </ns0:txBody>
+      </ns0:sp>
+      <ns0:sp>
+        <ns0:nvSpPr>
+          <ns0:cNvPr id="67" name="rect"/>
+          <ns0:cNvSpPr/>
+          <ns0:nvPr/>
+        </ns0:nvSpPr>
+        <ns0:spPr>
+          <ns1:xfrm>
+            <ns1:off x="9523910" y="4124793"/>
+            <ns1:ext cx="327507" cy="36390"/>
+          </ns1:xfrm>
+          <ns1:prstGeom prst="roundRect">
+            <ns1:avLst>
+              <ns1:gd name="adj" fmla="val 40000"/>
+            </ns1:avLst>
+          </ns1:prstGeom>
+          <ns1:solidFill>
+            <ns1:srgbClr val="D2D3C8"/>
+          </ns1:solidFill>
+          <ns1:ln w="7278" cap="flat">
+            <ns1:noFill/>
+            <ns1:round/>
+          </ns1:ln>
+        </ns0:spPr>
+      </ns0:sp>
+      <ns0:sp>
+        <ns0:nvSpPr>
+          <ns0:cNvPr id="68" name="rect"/>
+          <ns0:cNvSpPr/>
+          <ns0:nvPr/>
+        </ns0:nvSpPr>
+        <ns0:spPr>
+          <ns1:xfrm>
+            <ns1:off x="9989698" y="4124793"/>
+            <ns1:ext cx="327507" cy="36390"/>
+          </ns1:xfrm>
+          <ns1:prstGeom prst="roundRect">
+            <ns1:avLst>
+              <ns1:gd name="adj" fmla="val 40000"/>
+            </ns1:avLst>
+          </ns1:prstGeom>
+          <ns1:solidFill>
+            <ns1:srgbClr val="D2D3C8"/>
+          </ns1:solidFill>
+          <ns1:ln w="7278" cap="flat">
+            <ns1:noFill/>
+            <ns1:round/>
+          </ns1:ln>
+        </ns0:spPr>
+      </ns0:sp>
+      <ns0:sp>
+        <ns0:nvSpPr>
+          <ns0:cNvPr id="69" name="rect"/>
+          <ns0:cNvSpPr/>
+          <ns0:nvPr/>
+        </ns0:nvSpPr>
+        <ns0:spPr>
+          <ns1:xfrm>
+            <ns1:off x="10455486" y="4124793"/>
+            <ns1:ext cx="327507" cy="36390"/>
+          </ns1:xfrm>
+          <ns1:prstGeom prst="roundRect">
+            <ns1:avLst>
+              <ns1:gd name="adj" fmla="val 40000"/>
+            </ns1:avLst>
+          </ns1:prstGeom>
+          <ns1:solidFill>
+            <ns1:srgbClr val="D2D3C8"/>
+          </ns1:solidFill>
+          <ns1:ln w="7278" cap="flat">
+            <ns1:noFill/>
+            <ns1:round/>
+          </ns1:ln>
+        </ns0:spPr>
+      </ns0:sp>
+      <ns0:sp>
+        <ns0:nvSpPr>
+          <ns0:cNvPr id="70" name="rect"/>
+          <ns0:cNvSpPr/>
+          <ns0:nvPr/>
+        </ns0:nvSpPr>
+        <ns0:spPr>
+          <ns1:xfrm>
+            <ns1:off x="6212447" y="4525080"/>
+            <ns1:ext cx="1601147" cy="538568"/>
+          </ns1:xfrm>
+          <ns1:prstGeom prst="roundRect">
+            <ns1:avLst>
+              <ns1:gd name="adj" fmla="val 16216"/>
+            </ns1:avLst>
+          </ns1:prstGeom>
+          <ns1:solidFill>
+            <ns1:srgbClr val="F4F1E9"/>
+          </ns1:solidFill>
+          <ns1:ln w="8734" cap="flat">
+            <ns1:solidFill>
+              <ns1:srgbClr val="D2D3C8"/>
+            </ns1:solidFill>
+            <ns1:round/>
+          </ns1:ln>
+        </ns0:spPr>
+      </ns0:sp>
+      <ns0:sp>
+        <ns0:nvSpPr>
+          <ns0:cNvPr id="71" name="path"/>
+          <ns0:cNvSpPr/>
+          <ns0:nvPr/>
+        </ns0:nvSpPr>
+        <ns0:spPr>
+          <ns1:xfrm>
+            <ns1:off x="6328894" y="4663361"/>
+            <ns1:ext cx="152837" cy="101891"/>
+          </ns1:xfrm>
+          <ns1:custGeom>
+            <ns1:avLst/>
+            <ns1:gdLst/>
+            <ns1:ahLst/>
+            <ns1:cxnLst/>
+            <ns1:rect l="0" t="0" r="r" b="b"/>
+            <ns1:pathLst>
+              <ns1:path w="20057" h="13372" fill="none" stroke="1" extrusionOk="0">
+                <ns1:moveTo>
+                  <ns1:pt x="0" y="5731"/>
+                </ns1:moveTo>
+                <ns1:lnTo>
+                  <ns1:pt x="7641" y="13372"/>
+                </ns1:lnTo>
+                <ns1:lnTo>
+                  <ns1:pt x="20057" y="0"/>
+                </ns1:lnTo>
+              </ns1:path>
+            </ns1:pathLst>
+          </ns1:custGeom>
+          <ns1:noFill/>
+          <ns1:ln w="18195" cap="rnd">
+            <ns1:solidFill>
+              <ns1:srgbClr val="08766B"/>
+            </ns1:solidFill>
+            <ns1:round/>
+          </ns1:ln>
+        </ns0:spPr>
+      </ns0:sp>
+      <ns0:sp>
+        <ns0:nvSpPr>
+          <ns0:cNvPr id="72" name="Accept sensor data"/>
+          <ns0:cNvSpPr txBox="1"/>
+          <ns0:nvPr/>
+        </ns0:nvSpPr>
+        <ns0:spPr>
+          <ns1:xfrm>
+            <ns1:off x="6518121" y="4599322"/>
+            <ns1:ext cx="1303020" cy="228600"/>
+          </ns1:xfrm>
+          <ns1:prstGeom prst="rect">
+            <ns1:avLst/>
+          </ns1:prstGeom>
+          <ns1:noFill/>
+          <ns1:ln w="7620" cap="flat">
+            <ns1:noFill/>
+            <ns1:round/>
+          </ns1:ln>
+        </ns0:spPr>
+        <ns0:txBody>
+          <ns1:bodyPr wrap="none" lIns="0" rIns="0" tIns="0" bIns="0" anchor="t" rtlCol="0">
+            <ns1:noAutofit/>
+          </ns1:bodyPr>
+          <ns1:lstStyle/>
+          <ns1:p>
+            <ns1:pPr marL="0" indent="0" algn="l" fontAlgn="base">
+              <ns1:lnSpc>
+                <ns1:spcPts val="1032"/>
+              </ns1:lnSpc>
+              <ns1:spcBef>
+                <ns1:spcPts val="0"/>
+              </ns1:spcBef>
+              <ns1:spcAft>
+                <ns1:spcPts val="0"/>
+              </ns1:spcAft>
+              <ns1:buNone/>
+            </ns1:pPr>
+            <ns1:r>
+              <ns1:rPr lang="en-AU" sz="1032" b="0" spc="0" dirty="0">
+                <ns1:solidFill>
+                  <ns1:srgbClr val="20231F"/>
+                </ns1:solidFill>
+                <ns1:latin typeface="Space Grotesk"/>
+                <ns1:ea typeface="Space Grotesk"/>
+                <ns1:cs typeface="Space Grotesk"/>
+              </ns1:rPr>
+              <ns1:t xml:space="preserve">Accept sensor data</ns1:t>
+            </ns1:r>
+            <ns1:endParaRPr lang="en-AU" sz="1032"/>
+          </ns1:p>
+        </ns0:txBody>
+      </ns0:sp>
+      <ns0:sp>
+        <ns0:nvSpPr>
+          <ns0:cNvPr id="73" name="Monitored state unchanged"/>
+          <ns0:cNvSpPr txBox="1"/>
+          <ns0:nvPr/>
+        </ns0:nvSpPr>
+        <ns0:spPr>
+          <ns1:xfrm>
+            <ns1:off x="6314339" y="4818687"/>
+            <ns1:ext cx="1562100" cy="198120"/>
+          </ns1:xfrm>
+          <ns1:prstGeom prst="rect">
+            <ns1:avLst/>
+          </ns1:prstGeom>
+          <ns1:noFill/>
+          <ns1:ln w="7620" cap="flat">
+            <ns1:noFill/>
+            <ns1:round/>
+          </ns1:ln>
+        </ns0:spPr>
+        <ns0:txBody>
+          <ns1:bodyPr wrap="none" lIns="0" rIns="0" tIns="0" bIns="0" anchor="t" rtlCol="0">
+            <ns1:noAutofit/>
+          </ns1:bodyPr>
+          <ns1:lstStyle/>
+          <ns1:p>
+            <ns1:pPr marL="0" indent="0" algn="l" fontAlgn="base">
+              <ns1:lnSpc>
+                <ns1:spcPts val="860"/>
+              </ns1:lnSpc>
+              <ns1:spcBef>
+                <ns1:spcPts val="0"/>
+              </ns1:spcBef>
+              <ns1:spcAft>
+                <ns1:spcPts val="0"/>
+              </ns1:spcAft>
+              <ns1:buNone/>
+            </ns1:pPr>
+            <ns1:r>
+              <ns1:rPr lang="en-AU" sz="860" b="0" spc="0" dirty="0">
+                <ns1:solidFill>
+                  <ns1:srgbClr val="60645B"/>
+                </ns1:solidFill>
+                <ns1:latin typeface="Space Grotesk"/>
+                <ns1:ea typeface="Space Grotesk"/>
+                <ns1:cs typeface="Space Grotesk"/>
+              </ns1:rPr>
+              <ns1:t xml:space="preserve">Monitored state unchanged</ns1:t>
+            </ns1:r>
+            <ns1:endParaRPr lang="en-AU" sz="860"/>
+          </ns1:p>
+        </ns0:txBody>
+      </ns0:sp>
+      <ns0:sp>
+        <ns0:nvSpPr>
+          <ns0:cNvPr id="74" name="rect"/>
+          <ns0:cNvSpPr/>
+          <ns0:nvPr/>
+        </ns0:nvSpPr>
+        <ns0:spPr>
+          <ns1:xfrm>
+            <ns1:off x="7930041" y="4525080"/>
+            <ns1:ext cx="1601147" cy="538568"/>
+          </ns1:xfrm>
+          <ns1:prstGeom prst="roundRect">
+            <ns1:avLst>
+              <ns1:gd name="adj" fmla="val 12162"/>
+            </ns1:avLst>
+          </ns1:prstGeom>
+          <ns1:solidFill>
+            <ns1:srgbClr val="E2EEE5"/>
+          </ns1:solidFill>
+          <ns1:ln w="8734" cap="flat">
+            <ns1:solidFill>
+              <ns1:srgbClr val="08766B"/>
+            </ns1:solidFill>
+            <ns1:round/>
+          </ns1:ln>
+        </ns0:spPr>
+      </ns0:sp>
+      <ns0:sp>
+        <ns0:nvSpPr>
+          <ns0:cNvPr id="75" name="Sensor-data consumer"/>
+          <ns0:cNvSpPr txBox="1"/>
+          <ns0:nvPr/>
+        </ns0:nvSpPr>
+        <ns0:spPr>
+          <ns1:xfrm>
+            <ns1:off x="8056244" y="4606943"/>
+            <ns1:ext cx="1409701" cy="220980"/>
+          </ns1:xfrm>
+          <ns1:prstGeom prst="rect">
+            <ns1:avLst/>
+          </ns1:prstGeom>
+          <ns1:noFill/>
+          <ns1:ln w="7620" cap="flat">
+            <ns1:noFill/>
+            <ns1:round/>
+          </ns1:ln>
+        </ns0:spPr>
+        <ns0:txBody>
+          <ns1:bodyPr wrap="none" lIns="0" rIns="0" tIns="0" bIns="0" anchor="t" rtlCol="0">
+            <ns1:noAutofit/>
+          </ns1:bodyPr>
+          <ns1:lstStyle/>
+          <ns1:p>
+            <ns1:pPr marL="0" indent="0" algn="l" fontAlgn="base">
+              <ns1:lnSpc>
+                <ns1:spcPts val="974"/>
+              </ns1:lnSpc>
+              <ns1:spcBef>
+                <ns1:spcPts val="0"/>
+              </ns1:spcBef>
+              <ns1:spcAft>
+                <ns1:spcPts val="0"/>
+              </ns1:spcAft>
+              <ns1:buNone/>
+            </ns1:pPr>
+            <ns1:r>
+              <ns1:rPr lang="en-AU" sz="974" b="0" spc="0" dirty="0">
+                <ns1:solidFill>
+                  <ns1:srgbClr val="20231F"/>
+                </ns1:solidFill>
+                <ns1:latin typeface="Space Grotesk"/>
+                <ns1:ea typeface="Space Grotesk"/>
+                <ns1:cs typeface="Space Grotesk"/>
+              </ns1:rPr>
+              <ns1:t xml:space="preserve">Sensor-data consumer</ns1:t>
+            </ns1:r>
+            <ns1:endParaRPr lang="en-AU" sz="974"/>
+          </ns1:p>
+        </ns0:txBody>
+      </ns0:sp>
+      <ns0:sp>
+        <ns0:nvSpPr>
+          <ns0:cNvPr id="76" name="IoT / autonomous system"/>
+          <ns0:cNvSpPr txBox="1"/>
+          <ns0:nvPr/>
+        </ns0:nvSpPr>
+        <ns0:spPr>
+          <ns1:xfrm>
+            <ns1:off x="8048624" y="4818687"/>
+            <ns1:ext cx="1424941" cy="198120"/>
+          </ns1:xfrm>
+          <ns1:prstGeom prst="rect">
+            <ns1:avLst/>
+          </ns1:prstGeom>
+          <ns1:noFill/>
+          <ns1:ln w="7620" cap="flat">
+            <ns1:noFill/>
+            <ns1:round/>
+          </ns1:ln>
+        </ns0:spPr>
+        <ns0:txBody>
+          <ns1:bodyPr wrap="none" lIns="0" rIns="0" tIns="0" bIns="0" anchor="t" rtlCol="0">
+            <ns1:noAutofit/>
+          </ns1:bodyPr>
+          <ns1:lstStyle/>
+          <ns1:p>
+            <ns1:pPr marL="0" indent="0" algn="l" fontAlgn="base">
+              <ns1:lnSpc>
+                <ns1:spcPts val="860"/>
+              </ns1:lnSpc>
+              <ns1:spcBef>
+                <ns1:spcPts val="0"/>
+              </ns1:spcBef>
+              <ns1:spcAft>
+                <ns1:spcPts val="0"/>
+              </ns1:spcAft>
+              <ns1:buNone/>
+            </ns1:pPr>
+            <ns1:r>
+              <ns1:rPr lang="en-AU" sz="860" b="0" spc="0" dirty="0">
+                <ns1:solidFill>
+                  <ns1:srgbClr val="60645B"/>
+                </ns1:solidFill>
+                <ns1:latin typeface="Space Grotesk"/>
+                <ns1:ea typeface="Space Grotesk"/>
+                <ns1:cs typeface="Space Grotesk"/>
+              </ns1:rPr>
+              <ns1:t xml:space="preserve">IoT / autonomous system</ns1:t>
+            </ns1:r>
+            <ns1:endParaRPr lang="en-AU" sz="860"/>
+          </ns1:p>
+        </ns0:txBody>
+      </ns0:sp>
+      <ns0:sp>
+        <ns0:nvSpPr>
+          <ns0:cNvPr id="77" name="rect"/>
+          <ns0:cNvSpPr/>
+          <ns0:nvPr/>
+        </ns0:nvSpPr>
+        <ns0:spPr>
+          <ns1:xfrm>
+            <ns1:off x="9647635" y="4525080"/>
+            <ns1:ext cx="1601147" cy="538568"/>
+          </ns1:xfrm>
+          <ns1:prstGeom prst="roundRect">
+            <ns1:avLst>
+              <ns1:gd name="adj" fmla="val 16216"/>
+            </ns1:avLst>
+          </ns1:prstGeom>
+          <ns1:solidFill>
+            <ns1:srgbClr val="F8E7DF"/>
+          </ns1:solidFill>
+          <ns1:ln w="8734" cap="flat">
+            <ns1:solidFill>
+              <ns1:srgbClr val="C43E2D"/>
+            </ns1:solidFill>
+            <ns1:round/>
+          </ns1:ln>
+        </ns0:spPr>
+      </ns0:sp>
+      <ns0:sp>
+        <ns0:nvSpPr>
+          <ns0:cNvPr id="78" name="path"/>
+          <ns0:cNvSpPr/>
+          <ns0:nvPr/>
+        </ns0:nvSpPr>
+        <ns0:spPr>
+          <ns1:xfrm>
+            <ns1:off x="9764082" y="4677917"/>
+            <ns1:ext cx="116447" cy="116447"/>
+          </ns1:xfrm>
+          <ns1:custGeom>
+            <ns1:avLst/>
+            <ns1:gdLst/>
+            <ns1:ahLst/>
+            <ns1:cxnLst/>
+            <ns1:rect l="0" t="0" r="r" b="b"/>
+            <ns1:pathLst>
+              <ns1:path w="15282" h="15282" fill="none" stroke="1" extrusionOk="0">
+                <ns1:moveTo>
+                  <ns1:pt x="0" y="0"/>
+                </ns1:moveTo>
+                <ns1:lnTo>
+                  <ns1:pt x="15282" y="15282"/>
+                </ns1:lnTo>
+                <ns1:moveTo>
+                  <ns1:pt x="15282" y="0"/>
+                </ns1:moveTo>
+                <ns1:lnTo>
+                  <ns1:pt x="0" y="15282"/>
+                </ns1:lnTo>
+              </ns1:path>
+            </ns1:pathLst>
+          </ns1:custGeom>
+          <ns1:noFill/>
+          <ns1:ln w="18195" cap="rnd">
+            <ns1:solidFill>
+              <ns1:srgbClr val="C43E2D"/>
+            </ns1:solidFill>
+            <ns1:round/>
+          </ns1:ln>
+        </ns0:spPr>
+      </ns0:sp>
+      <ns0:sp>
+        <ns0:nvSpPr>
+          <ns0:cNvPr id="79" name="Reject &amp; raise alert"/>
+          <ns0:cNvSpPr txBox="1"/>
+          <ns0:nvPr/>
+        </ns0:nvSpPr>
+        <ns0:spPr>
+          <ns1:xfrm>
+            <ns1:off x="9953308" y="4599322"/>
+            <ns1:ext cx="1234440" cy="228600"/>
+          </ns1:xfrm>
+          <ns1:prstGeom prst="rect">
+            <ns1:avLst/>
+          </ns1:prstGeom>
+          <ns1:noFill/>
+          <ns1:ln w="7620" cap="flat">
+            <ns1:noFill/>
+            <ns1:round/>
+          </ns1:ln>
+        </ns0:spPr>
+        <ns0:txBody>
+          <ns1:bodyPr wrap="none" lIns="0" rIns="0" tIns="0" bIns="0" anchor="t" rtlCol="0">
+            <ns1:noAutofit/>
+          </ns1:bodyPr>
+          <ns1:lstStyle/>
+          <ns1:p>
+            <ns1:pPr marL="0" indent="0" algn="l" fontAlgn="base">
+              <ns1:lnSpc>
+                <ns1:spcPts val="1032"/>
+              </ns1:lnSpc>
+              <ns1:spcBef>
+                <ns1:spcPts val="0"/>
+              </ns1:spcBef>
+              <ns1:spcAft>
+                <ns1:spcPts val="0"/>
+              </ns1:spcAft>
+              <ns1:buNone/>
+            </ns1:pPr>
+            <ns1:r>
+              <ns1:rPr lang="en-AU" sz="1032" b="0" spc="0" dirty="0">
+                <ns1:solidFill>
+                  <ns1:srgbClr val="C43E2D"/>
+                </ns1:solidFill>
+                <ns1:latin typeface="Space Grotesk"/>
+                <ns1:ea typeface="Space Grotesk"/>
+                <ns1:cs typeface="Space Grotesk"/>
+              </ns1:rPr>
+              <ns1:t xml:space="preserve">Reject &amp; raise alert</ns1:t>
+            </ns1:r>
+            <ns1:endParaRPr lang="en-AU" sz="1032"/>
+          </ns1:p>
+        </ns0:txBody>
+      </ns0:sp>
+      <ns0:sp>
+        <ns0:nvSpPr>
+          <ns0:cNvPr id="80" name="Changed state detected"/>
+          <ns0:cNvSpPr txBox="1"/>
+          <ns0:nvPr/>
+        </ns0:nvSpPr>
+        <ns0:spPr>
+          <ns1:xfrm>
+            <ns1:off x="9749527" y="4818687"/>
+            <ns1:ext cx="1371600" cy="198120"/>
+          </ns1:xfrm>
+          <ns1:prstGeom prst="rect">
+            <ns1:avLst/>
+          </ns1:prstGeom>
+          <ns1:noFill/>
+          <ns1:ln w="7620" cap="flat">
+            <ns1:noFill/>
+            <ns1:round/>
+          </ns1:ln>
+        </ns0:spPr>
+        <ns0:txBody>
+          <ns1:bodyPr wrap="none" lIns="0" rIns="0" tIns="0" bIns="0" anchor="t" rtlCol="0">
+            <ns1:noAutofit/>
+          </ns1:bodyPr>
+          <ns1:lstStyle/>
+          <ns1:p>
+            <ns1:pPr marL="0" indent="0" algn="l" fontAlgn="base">
+              <ns1:lnSpc>
+                <ns1:spcPts val="860"/>
+              </ns1:lnSpc>
+              <ns1:spcBef>
+                <ns1:spcPts val="0"/>
+              </ns1:spcBef>
+              <ns1:spcAft>
+                <ns1:spcPts val="0"/>
+              </ns1:spcAft>
+              <ns1:buNone/>
+            </ns1:pPr>
+            <ns1:r>
+              <ns1:rPr lang="en-AU" sz="860" b="0" spc="0" dirty="0">
+                <ns1:solidFill>
+                  <ns1:srgbClr val="C43E2D"/>
+                </ns1:solidFill>
+                <ns1:latin typeface="Space Grotesk"/>
+                <ns1:ea typeface="Space Grotesk"/>
+                <ns1:cs typeface="Space Grotesk"/>
+              </ns1:rPr>
+              <ns1:t xml:space="preserve">Changed state detected</ns1:t>
+            </ns1:r>
+            <ns1:endParaRPr lang="en-AU" sz="860"/>
+          </ns1:p>
+        </ns0:txBody>
+      </ns0:sp>
+      <ns0:sp>
+        <ns0:nvSpPr>
+          <ns0:cNvPr id="81" name="activity-panel"/>
+          <ns0:cNvSpPr/>
+          <ns0:nvPr/>
+        </ns0:nvSpPr>
+        <ns0:spPr>
+          <ns1:xfrm>
+            <ns1:off x="360883" y="5357041"/>
+            <ns1:ext cx="8408517" cy="940684"/>
+          </ns1:xfrm>
+          <ns1:prstGeom prst="roundRect">
+            <ns1:avLst>
+              <ns1:gd name="adj" fmla="val 9526"/>
+            </ns1:avLst>
+          </ns1:prstGeom>
+          <ns1:solidFill>
+            <ns1:srgbClr val="F4F1E9"/>
+          </ns1:solidFill>
+          <ns1:ln w="7468" cap="flat">
+            <ns1:solidFill>
+              <ns1:srgbClr val="D2D3C8"/>
+            </ns1:solidFill>
+            <ns1:round/>
+          </ns1:ln>
+        </ns0:spPr>
+      </ns0:sp>
+      <ns0:sp>
+        <ns0:nvSpPr>
+          <ns0:cNvPr id="82" name="activity-title"/>
+          <ns0:cNvSpPr txBox="1"/>
+          <ns0:nvPr/>
+        </ns0:nvSpPr>
+        <ns0:spPr>
+          <ns1:xfrm>
+            <ns1:off x="502768" y="5461588"/>
+            <ns1:ext cx="1584960" cy="232715"/>
+          </ns1:xfrm>
+          <ns1:prstGeom prst="rect">
+            <ns1:avLst/>
+          </ns1:prstGeom>
+          <ns1:noFill/>
+          <ns1:ln w="7620" cap="flat">
+            <ns1:noFill/>
+            <ns1:round/>
+          </ns1:ln>
+        </ns0:spPr>
+        <ns0:txBody>
+          <ns1:bodyPr wrap="none" lIns="0" rIns="0" tIns="0" bIns="0" anchor="t" rtlCol="0">
+            <ns1:noAutofit/>
+          </ns1:bodyPr>
+          <ns1:lstStyle/>
+          <ns1:p>
+            <ns1:pPr marL="0" indent="0" algn="l" fontAlgn="base">
+              <ns1:lnSpc>
+                <ns1:spcPts val="1270"/>
+              </ns1:lnSpc>
+              <ns1:spcBef>
+                <ns1:spcPts val="0"/>
+              </ns1:spcBef>
+              <ns1:spcAft>
+                <ns1:spcPts val="0"/>
+              </ns1:spcAft>
+              <ns1:buNone/>
+            </ns1:pPr>
+            <ns1:r>
+              <ns1:rPr lang="en-AU" sz="1058" b="1" spc="-21" dirty="0">
+                <ns1:solidFill>
+                  <ns1:srgbClr val="20231F"/>
+                </ns1:solidFill>
+                <ns1:latin typeface="Space Grotesk"/>
+                <ns1:ea typeface="Space Grotesk"/>
+                <ns1:cs typeface="Space Grotesk"/>
+              </ns1:rPr>
+              <ns1:t xml:space="preserve">USB scenario</ns1:t>
+            </ns1:r>
+            <ns1:endParaRPr lang="en-AU" sz="1058"/>
+          </ns1:p>
+        </ns0:txBody>
+      </ns0:sp>
+      <ns0:sp>
+        <ns0:nvSpPr>
+          <ns0:cNvPr id="83" name="LI"/>
+          <ns0:cNvSpPr txBox="1"/>
+          <ns0:nvPr/>
+        </ns0:nvSpPr>
+        <ns0:spPr>
+          <ns1:xfrm>
+            <ns1:off x="741731" y="5734855"/>
+            <ns1:ext cx="2423160" cy="217780"/>
+          </ns1:xfrm>
+          <ns1:prstGeom prst="rect">
+            <ns1:avLst/>
+          </ns1:prstGeom>
+          <ns1:noFill/>
+          <ns1:ln w="7620" cap="flat">
+            <ns1:noFill/>
+            <ns1:round/>
+          </ns1:ln>
+        </ns0:spPr>
+        <ns0:txBody>
+          <ns1:bodyPr wrap="none" lIns="0" rIns="0" tIns="0" bIns="0" anchor="t" rtlCol="0">
+            <ns1:noAutofit/>
+          </ns1:bodyPr>
+          <ns1:lstStyle/>
+          <ns1:p>
+            <ns1:pPr marL="0" indent="0" algn="l" fontAlgn="base">
+              <ns1:lnSpc>
+                <ns1:spcPts val="1129"/>
+              </ns1:lnSpc>
+              <ns1:spcBef>
+                <ns1:spcPts val="0"/>
+              </ns1:spcBef>
+              <ns1:spcAft>
+                <ns1:spcPts val="0"/>
+              </ns1:spcAft>
+              <ns1:buNone/>
+            </ns1:pPr>
+            <ns1:r>
+              <ns1:rPr lang="en-AU" sz="941" b="0" spc="0" dirty="0">
+                <ns1:solidFill>
+                  <ns1:srgbClr val="60645B"/>
+                </ns1:solidFill>
+                <ns1:latin typeface="Space Grotesk"/>
+                <ns1:ea typeface="Space Grotesk"/>
+                <ns1:cs typeface="Space Grotesk"/>
+              </ns1:rPr>
+              <ns1:t xml:space="preserve">Detect USB state change</ns1:t>
+            </ns1:r>
+            <ns1:endParaRPr lang="en-AU" sz="941"/>
+          </ns1:p>
+        </ns0:txBody>
+      </ns0:sp>
+      <ns0:sp>
+        <ns0:nvSpPr>
+          <ns0:cNvPr id="84" name="activity-marker"/>
+          <ns0:cNvSpPr/>
+          <ns0:nvPr/>
+        </ns0:nvSpPr>
+        <ns0:spPr>
+          <ns1:xfrm>
+            <ns1:off x="562508" y="5754224"/>
+            <ns1:ext cx="119482" cy="119482"/>
+          </ns1:xfrm>
+          <ns1:prstGeom prst="roundRect">
+            <ns1:avLst>
+              <ns1:gd name="adj" fmla="val 50000"/>
+            </ns1:avLst>
+          </ns1:prstGeom>
+          <ns1:noFill/>
+          <ns1:ln w="7468" cap="flat">
+            <ns1:solidFill>
+              <ns1:srgbClr val="D2D3C8"/>
+            </ns1:solidFill>
+            <ns1:round/>
+          </ns1:ln>
+        </ns0:spPr>
+      </ns0:sp>
+      <ns0:sp>
+        <ns0:nvSpPr>
+          <ns0:cNvPr id="85" name="LI"/>
+          <ns0:cNvSpPr txBox="1"/>
+          <ns0:nvPr/>
+        </ns0:nvSpPr>
+        <ns0:spPr>
+          <ns1:xfrm>
+            <ns1:off x="3484790" y="5734855"/>
+            <ns1:ext cx="2423160" cy="217780"/>
+          </ns1:xfrm>
+          <ns1:prstGeom prst="rect">
+            <ns1:avLst/>
+          </ns1:prstGeom>
+          <ns1:noFill/>
+          <ns1:ln w="7620" cap="flat">
+            <ns1:noFill/>
+            <ns1:round/>
+          </ns1:ln>
+        </ns0:spPr>
+        <ns0:txBody>
+          <ns1:bodyPr wrap="none" lIns="0" rIns="0" tIns="0" bIns="0" anchor="t" rtlCol="0">
+            <ns1:noAutofit/>
+          </ns1:bodyPr>
+          <ns1:lstStyle/>
+          <ns1:p>
+            <ns1:pPr marL="0" indent="0" algn="l" fontAlgn="base">
+              <ns1:lnSpc>
+                <ns1:spcPts val="1129"/>
+              </ns1:lnSpc>
+              <ns1:spcBef>
+                <ns1:spcPts val="0"/>
+              </ns1:spcBef>
+              <ns1:spcAft>
+                <ns1:spcPts val="0"/>
+              </ns1:spcAft>
+              <ns1:buNone/>
+            </ns1:pPr>
+            <ns1:r>
+              <ns1:rPr lang="en-AU" sz="941" b="0" spc="0" dirty="0">
+                <ns1:solidFill>
+                  <ns1:srgbClr val="60645B"/>
+                </ns1:solidFill>
+                <ns1:latin typeface="Space Grotesk"/>
+                <ns1:ea typeface="Space Grotesk"/>
+                <ns1:cs typeface="Space Grotesk"/>
+              </ns1:rPr>
+              <ns1:t xml:space="preserve">Hash &amp; submit changed I2Map</ns1:t>
+            </ns1:r>
+            <ns1:endParaRPr lang="en-AU" sz="941"/>
+          </ns1:p>
+        </ns0:txBody>
+      </ns0:sp>
+      <ns0:sp>
+        <ns0:nvSpPr>
+          <ns0:cNvPr id="86" name="activity-marker"/>
+          <ns0:cNvSpPr/>
+          <ns0:nvPr/>
+        </ns0:nvSpPr>
+        <ns0:spPr>
+          <ns1:xfrm>
+            <ns1:off x="3305568" y="5754224"/>
+            <ns1:ext cx="119482" cy="119482"/>
+          </ns1:xfrm>
+          <ns1:prstGeom prst="roundRect">
+            <ns1:avLst>
+              <ns1:gd name="adj" fmla="val 50000"/>
+            </ns1:avLst>
+          </ns1:prstGeom>
+          <ns1:noFill/>
+          <ns1:ln w="7468" cap="flat">
+            <ns1:solidFill>
+              <ns1:srgbClr val="D2D3C8"/>
+            </ns1:solidFill>
+            <ns1:round/>
+          </ns1:ln>
+        </ns0:spPr>
+      </ns0:sp>
+      <ns0:sp>
+        <ns0:nvSpPr>
+          <ns0:cNvPr id="87" name="LI"/>
+          <ns0:cNvSpPr txBox="1"/>
+          <ns0:nvPr/>
+        </ns0:nvSpPr>
+        <ns0:spPr>
+          <ns1:xfrm>
+            <ns1:off x="6227850" y="5734855"/>
+            <ns1:ext cx="2423160" cy="217780"/>
+          </ns1:xfrm>
+          <ns1:prstGeom prst="rect">
+            <ns1:avLst/>
+          </ns1:prstGeom>
+          <ns1:noFill/>
+          <ns1:ln w="7620" cap="flat">
+            <ns1:noFill/>
+            <ns1:round/>
+          </ns1:ln>
+        </ns0:spPr>
+        <ns0:txBody>
+          <ns1:bodyPr wrap="none" lIns="0" rIns="0" tIns="0" bIns="0" anchor="t" rtlCol="0">
+            <ns1:noAutofit/>
+          </ns1:bodyPr>
+          <ns1:lstStyle/>
+          <ns1:p>
+            <ns1:pPr marL="0" indent="0" algn="l" fontAlgn="base">
+              <ns1:lnSpc>
+                <ns1:spcPts val="1129"/>
+              </ns1:lnSpc>
+              <ns1:spcBef>
+                <ns1:spcPts val="0"/>
+              </ns1:spcBef>
+              <ns1:spcAft>
+                <ns1:spcPts val="0"/>
+              </ns1:spcAft>
+              <ns1:buNone/>
+            </ns1:pPr>
+            <ns1:r>
+              <ns1:rPr lang="en-AU" sz="941" b="0" spc="0" dirty="0">
+                <ns1:solidFill>
+                  <ns1:srgbClr val="60645B"/>
+                </ns1:solidFill>
+                <ns1:latin typeface="Space Grotesk"/>
+                <ns1:ea typeface="Space Grotesk"/>
+                <ns1:cs typeface="Space Grotesk"/>
+              </ns1:rPr>
+              <ns1:t xml:space="preserve">Receive hashes &amp; compare</ns1:t>
+            </ns1:r>
+            <ns1:endParaRPr lang="en-AU" sz="941"/>
+          </ns1:p>
+        </ns0:txBody>
+      </ns0:sp>
+      <ns0:sp>
+        <ns0:nvSpPr>
+          <ns0:cNvPr id="88" name="activity-marker"/>
+          <ns0:cNvSpPr/>
+          <ns0:nvPr/>
+        </ns0:nvSpPr>
+        <ns0:spPr>
+          <ns1:xfrm>
+            <ns1:off x="6048628" y="5754224"/>
+            <ns1:ext cx="119482" cy="119482"/>
+          </ns1:xfrm>
+          <ns1:prstGeom prst="roundRect">
+            <ns1:avLst>
+              <ns1:gd name="adj" fmla="val 50000"/>
+            </ns1:avLst>
+          </ns1:prstGeom>
+          <ns1:noFill/>
+          <ns1:ln w="7468" cap="flat">
+            <ns1:solidFill>
+              <ns1:srgbClr val="D2D3C8"/>
+            </ns1:solidFill>
+            <ns1:round/>
+          </ns1:ln>
+        </ns0:spPr>
+      </ns0:sp>
+      <ns0:sp>
+        <ns0:nvSpPr>
+          <ns0:cNvPr id="89" name="LI"/>
+          <ns0:cNvSpPr txBox="1"/>
+          <ns0:nvPr/>
+        </ns0:nvSpPr>
+        <ns0:spPr>
+          <ns1:xfrm>
+            <ns1:off x="741731" y="5997621"/>
+            <ns1:ext cx="2423160" cy="217779"/>
+          </ns1:xfrm>
+          <ns1:prstGeom prst="rect">
+            <ns1:avLst/>
+          </ns1:prstGeom>
+          <ns1:noFill/>
+          <ns1:ln w="7620" cap="flat">
+            <ns1:noFill/>
+            <ns1:round/>
+          </ns1:ln>
+        </ns0:spPr>
+        <ns0:txBody>
+          <ns1:bodyPr wrap="none" lIns="0" rIns="0" tIns="0" bIns="0" anchor="t" rtlCol="0">
+            <ns1:noAutofit/>
+          </ns1:bodyPr>
+          <ns1:lstStyle/>
+          <ns1:p>
+            <ns1:pPr marL="0" indent="0" algn="l" fontAlgn="base">
+              <ns1:lnSpc>
+                <ns1:spcPts val="1129"/>
+              </ns1:lnSpc>
+              <ns1:spcBef>
+                <ns1:spcPts val="0"/>
+              </ns1:spcBef>
+              <ns1:spcAft>
+                <ns1:spcPts val="0"/>
+              </ns1:spcAft>
+              <ns1:buNone/>
+            </ns1:pPr>
+            <ns1:r>
+              <ns1:rPr lang="en-AU" sz="941" b="0" spc="0" dirty="0">
+                <ns1:solidFill>
+                  <ns1:srgbClr val="60645B"/>
+                </ns1:solidFill>
+                <ns1:latin typeface="Space Grotesk"/>
+                <ns1:ea typeface="Space Grotesk"/>
+                <ns1:cs typeface="Space Grotesk"/>
+              </ns1:rPr>
+              <ns1:t xml:space="preserve">Reject sensor data</ns1:t>
+            </ns1:r>
+            <ns1:endParaRPr lang="en-AU" sz="941"/>
+          </ns1:p>
+        </ns0:txBody>
+      </ns0:sp>
+      <ns0:sp>
+        <ns0:nvSpPr>
+          <ns0:cNvPr id="90" name="activity-marker"/>
+          <ns0:cNvSpPr/>
+          <ns0:nvPr/>
+        </ns0:nvSpPr>
+        <ns0:spPr>
+          <ns1:xfrm>
+            <ns1:off x="562508" y="6016990"/>
+            <ns1:ext cx="119482" cy="119482"/>
+          </ns1:xfrm>
+          <ns1:prstGeom prst="roundRect">
+            <ns1:avLst>
+              <ns1:gd name="adj" fmla="val 50000"/>
+            </ns1:avLst>
+          </ns1:prstGeom>
+          <ns1:noFill/>
+          <ns1:ln w="7468" cap="flat">
+            <ns1:solidFill>
+              <ns1:srgbClr val="D2D3C8"/>
+            </ns1:solidFill>
+            <ns1:round/>
+          </ns1:ln>
+        </ns0:spPr>
+      </ns0:sp>
+      <ns0:sp>
+        <ns0:nvSpPr>
+          <ns0:cNvPr id="91" name="LI"/>
+          <ns0:cNvSpPr txBox="1"/>
+          <ns0:nvPr/>
+        </ns0:nvSpPr>
+        <ns0:spPr>
+          <ns1:xfrm>
+            <ns1:off x="3484790" y="5997621"/>
+            <ns1:ext cx="2423160" cy="217779"/>
+          </ns1:xfrm>
+          <ns1:prstGeom prst="rect">
+            <ns1:avLst/>
+          </ns1:prstGeom>
+          <ns1:noFill/>
+          <ns1:ln w="7620" cap="flat">
+            <ns1:noFill/>
+            <ns1:round/>
+          </ns1:ln>
+        </ns0:spPr>
+        <ns0:txBody>
+          <ns1:bodyPr wrap="none" lIns="0" rIns="0" tIns="0" bIns="0" anchor="t" rtlCol="0">
+            <ns1:noAutofit/>
+          </ns1:bodyPr>
+          <ns1:lstStyle/>
+          <ns1:p>
+            <ns1:pPr marL="0" indent="0" algn="l" fontAlgn="base">
+              <ns1:lnSpc>
+                <ns1:spcPts val="1129"/>
+              </ns1:lnSpc>
+              <ns1:spcBef>
+                <ns1:spcPts val="0"/>
+              </ns1:spcBef>
+              <ns1:spcAft>
+                <ns1:spcPts val="0"/>
+              </ns1:spcAft>
+              <ns1:buNone/>
+            </ns1:pPr>
+            <ns1:r>
+              <ns1:rPr lang="en-AU" sz="941" b="0" spc="0" dirty="0">
+                <ns1:solidFill>
+                  <ns1:srgbClr val="60645B"/>
+                </ns1:solidFill>
+                <ns1:latin typeface="Space Grotesk"/>
+                <ns1:ea typeface="Space Grotesk"/>
+                <ns1:cs typeface="Space Grotesk"/>
+              </ns1:rPr>
+              <ns1:t xml:space="preserve">Notify administrator</ns1:t>
+            </ns1:r>
+            <ns1:endParaRPr lang="en-AU" sz="941"/>
+          </ns1:p>
+        </ns0:txBody>
+      </ns0:sp>
+      <ns0:sp>
+        <ns0:nvSpPr>
+          <ns0:cNvPr id="92" name="activity-marker"/>
+          <ns0:cNvSpPr/>
+          <ns0:nvPr/>
+        </ns0:nvSpPr>
+        <ns0:spPr>
+          <ns1:xfrm>
+            <ns1:off x="3305568" y="6016990"/>
+            <ns1:ext cx="119482" cy="119482"/>
+          </ns1:xfrm>
+          <ns1:prstGeom prst="roundRect">
+            <ns1:avLst>
+              <ns1:gd name="adj" fmla="val 50000"/>
+            </ns1:avLst>
+          </ns1:prstGeom>
+          <ns1:noFill/>
+          <ns1:ln w="7468" cap="flat">
+            <ns1:solidFill>
+              <ns1:srgbClr val="D2D3C8"/>
+            </ns1:solidFill>
+            <ns1:round/>
+          </ns1:ln>
+        </ns0:spPr>
+      </ns0:sp>
+      <ns0:sp>
+        <ns0:nvSpPr>
+          <ns0:cNvPr id="93" name="LI"/>
+          <ns0:cNvSpPr txBox="1"/>
+          <ns0:nvPr/>
+        </ns0:nvSpPr>
+        <ns0:spPr>
+          <ns1:xfrm>
+            <ns1:off x="6227850" y="5997621"/>
+            <ns1:ext cx="2423160" cy="217779"/>
+          </ns1:xfrm>
+          <ns1:prstGeom prst="rect">
+            <ns1:avLst/>
+          </ns1:prstGeom>
+          <ns1:noFill/>
+          <ns1:ln w="7620" cap="flat">
+            <ns1:noFill/>
+            <ns1:round/>
+          </ns1:ln>
+        </ns0:spPr>
+        <ns0:txBody>
+          <ns1:bodyPr wrap="none" lIns="0" rIns="0" tIns="0" bIns="0" anchor="t" rtlCol="0">
+            <ns1:noAutofit/>
+          </ns1:bodyPr>
+          <ns1:lstStyle/>
+          <ns1:p>
+            <ns1:pPr marL="0" indent="0" algn="l" fontAlgn="base">
+              <ns1:lnSpc>
+                <ns1:spcPts val="1129"/>
+              </ns1:lnSpc>
+              <ns1:spcBef>
+                <ns1:spcPts val="0"/>
+              </ns1:spcBef>
+              <ns1:spcAft>
+                <ns1:spcPts val="0"/>
+              </ns1:spcAft>
+              <ns1:buNone/>
+            </ns1:pPr>
+            <ns1:r>
+              <ns1:rPr lang="en-AU" sz="941" b="0" spc="0" dirty="0">
+                <ns1:solidFill>
+                  <ns1:srgbClr val="60645B"/>
+                </ns1:solidFill>
+                <ns1:latin typeface="Space Grotesk"/>
+                <ns1:ea typeface="Space Grotesk"/>
+                <ns1:cs typeface="Space Grotesk"/>
+              </ns1:rPr>
+              <ns1:t xml:space="preserve">Restore approved state</ns1:t>
+            </ns1:r>
+            <ns1:endParaRPr lang="en-AU" sz="941"/>
+          </ns1:p>
+        </ns0:txBody>
+      </ns0:sp>
+      <ns0:sp>
+        <ns0:nvSpPr>
+          <ns0:cNvPr id="94" name="activity-marker"/>
+          <ns0:cNvSpPr/>
+          <ns0:nvPr/>
+        </ns0:nvSpPr>
+        <ns0:spPr>
+          <ns1:xfrm>
+            <ns1:off x="6048628" y="6016990"/>
+            <ns1:ext cx="119482" cy="119482"/>
+          </ns1:xfrm>
+          <ns1:prstGeom prst="roundRect">
+            <ns1:avLst>
+              <ns1:gd name="adj" fmla="val 50000"/>
+            </ns1:avLst>
+          </ns1:prstGeom>
+          <ns1:noFill/>
+          <ns1:ln w="7468" cap="flat">
+            <ns1:solidFill>
+              <ns1:srgbClr val="D2D3C8"/>
+            </ns1:solidFill>
+            <ns1:round/>
+          </ns1:ln>
+        </ns0:spPr>
+      </ns0:sp>
+      <ns0:sp>
+        <ns0:nvSpPr>
+          <ns0:cNvPr id="95" name="BUTTON"/>
+          <ns0:cNvSpPr/>
+          <ns0:nvPr/>
+        </ns0:nvSpPr>
+        <ns0:spPr>
+          <ns1:xfrm>
+            <ns1:off x="8918753" y="5446535"/>
+            <ns1:ext cx="2509113" cy="343510"/>
+          </ns1:xfrm>
+          <ns1:prstGeom prst="roundRect">
+            <ns1:avLst>
+              <ns1:gd name="adj" fmla="val 15217"/>
+            </ns1:avLst>
+          </ns1:prstGeom>
+          <ns1:noFill/>
+          <ns1:ln w="7468" cap="flat">
+            <ns1:solidFill>
+              <ns1:srgbClr val="D2D3C8"/>
+            </ns1:solidFill>
+            <ns1:round/>
+          </ns1:ln>
+        </ns0:spPr>
+      </ns0:sp>
+      <ns0:sp>
+        <ns0:nvSpPr>
+          <ns0:cNvPr id="96" name="BUTTON"/>
+          <ns0:cNvSpPr txBox="1"/>
+          <ns0:nvPr/>
+        </ns0:nvSpPr>
+        <ns0:spPr>
+          <ns1:xfrm>
+            <ns1:off x="9030767" y="5536147"/>
+            <ns1:ext cx="1763573" cy="217780"/>
+          </ns1:xfrm>
+          <ns1:prstGeom prst="rect">
+            <ns1:avLst/>
+          </ns1:prstGeom>
+          <ns1:noFill/>
+          <ns1:ln w="7620" cap="flat">
+            <ns1:noFill/>
+            <ns1:round/>
+          </ns1:ln>
+        </ns0:spPr>
+        <ns0:txBody>
+          <ns1:bodyPr wrap="none" lIns="0" rIns="0" tIns="0" bIns="0" anchor="t" rtlCol="0">
+            <ns1:noAutofit/>
+          </ns1:bodyPr>
+          <ns1:lstStyle/>
+          <ns1:p>
+            <ns1:pPr marL="0" indent="0" algn="l" fontAlgn="base">
+              <ns1:lnSpc>
+                <ns1:spcPts val="941"/>
+              </ns1:lnSpc>
+              <ns1:spcBef>
+                <ns1:spcPts val="0"/>
+              </ns1:spcBef>
+              <ns1:spcAft>
+                <ns1:spcPts val="0"/>
+              </ns1:spcAft>
+              <ns1:buNone/>
+            </ns1:pPr>
+            <ns1:r>
+              <ns1:rPr lang="en-AU" sz="941" b="0" spc="0" dirty="0">
+                <ns1:solidFill>
+                  <ns1:srgbClr val="20231F"/>
+                </ns1:solidFill>
+                <ns1:latin typeface="Space Grotesk"/>
+                <ns1:ea typeface="Space Grotesk"/>
+                <ns1:cs typeface="Space Grotesk"/>
+              </ns1:rPr>
+              <ns1:t xml:space="preserve">Scenario 1 </ns1:t>
+            </ns1:r>
+            <ns1:r>
+              <ns1:rPr lang="en-AU" sz="941" b="1" spc="0" dirty="0">
+                <ns1:solidFill>
+                  <ns1:srgbClr val="20231F"/>
+                </ns1:solidFill>
+                <ns1:latin typeface="Space Grotesk"/>
+                <ns1:ea typeface="Space Grotesk"/>
+                <ns1:cs typeface="Space Grotesk"/>
+              </ns1:rPr>
+              <ns1:t xml:space="preserve">Onboard &amp; accept</ns1:t>
+            </ns1:r>
+            <ns1:endParaRPr lang="en-AU" sz="941"/>
+          </ns1:p>
+        </ns0:txBody>
+      </ns0:sp>
+      <ns0:sp>
+        <ns0:nvSpPr>
+          <ns0:cNvPr id="97" name="BUTTON"/>
+          <ns0:cNvSpPr/>
+          <ns0:nvPr/>
+        </ns0:nvSpPr>
+        <ns0:spPr>
+          <ns1:xfrm>
+            <ns1:off x="8918753" y="5864721"/>
+            <ns1:ext cx="2509113" cy="343510"/>
+          </ns1:xfrm>
+          <ns1:prstGeom prst="roundRect">
+            <ns1:avLst>
+              <ns1:gd name="adj" fmla="val 15217"/>
+            </ns1:avLst>
+          </ns1:prstGeom>
+          <ns1:solidFill>
+            <ns1:srgbClr val="F8E7DF"/>
+          </ns1:solidFill>
+          <ns1:ln w="7468" cap="flat">
+            <ns1:solidFill>
+              <ns1:srgbClr val="C43E2D"/>
+            </ns1:solidFill>
+            <ns1:round/>
+          </ns1:ln>
+        </ns0:spPr>
+      </ns0:sp>
+      <ns0:sp>
+        <ns0:nvSpPr>
+          <ns0:cNvPr id="98" name="BUTTON"/>
+          <ns0:cNvSpPr txBox="1"/>
+          <ns0:nvPr/>
+        </ns0:nvSpPr>
+        <ns0:spPr>
+          <ns1:xfrm>
+            <ns1:off x="9030767" y="5954332"/>
+            <ns1:ext cx="1666495" cy="217780"/>
+          </ns1:xfrm>
+          <ns1:prstGeom prst="rect">
+            <ns1:avLst/>
+          </ns1:prstGeom>
+          <ns1:noFill/>
+          <ns1:ln w="7620" cap="flat">
+            <ns1:noFill/>
+            <ns1:round/>
+          </ns1:ln>
+        </ns0:spPr>
+        <ns0:txBody>
+          <ns1:bodyPr wrap="none" lIns="0" rIns="0" tIns="0" bIns="0" anchor="t" rtlCol="0">
+            <ns1:noAutofit/>
+          </ns1:bodyPr>
+          <ns1:lstStyle/>
+          <ns1:p>
+            <ns1:pPr marL="0" indent="0" algn="l" fontAlgn="base">
+              <ns1:lnSpc>
+                <ns1:spcPts val="941"/>
+              </ns1:lnSpc>
+              <ns1:spcBef>
+                <ns1:spcPts val="0"/>
+              </ns1:spcBef>
+              <ns1:spcAft>
+                <ns1:spcPts val="0"/>
+              </ns1:spcAft>
+              <ns1:buNone/>
+            </ns1:pPr>
+            <ns1:r>
+              <ns1:rPr lang="en-AU" sz="941" b="0" spc="0" dirty="0">
+                <ns1:solidFill>
+                  <ns1:srgbClr val="C43E2D"/>
+                </ns1:solidFill>
+                <ns1:latin typeface="Space Grotesk"/>
+                <ns1:ea typeface="Space Grotesk"/>
+                <ns1:cs typeface="Space Grotesk"/>
+              </ns1:rPr>
+              <ns1:t xml:space="preserve">Scenario 2 </ns1:t>
+            </ns1:r>
+            <ns1:r>
+              <ns1:rPr lang="en-AU" sz="941" b="1" spc="0" dirty="0">
+                <ns1:solidFill>
+                  <ns1:srgbClr val="C43E2D"/>
+                </ns1:solidFill>
+                <ns1:latin typeface="Space Grotesk"/>
+                <ns1:ea typeface="Space Grotesk"/>
+                <ns1:cs typeface="Space Grotesk"/>
+              </ns1:rPr>
+              <ns1:t xml:space="preserve">Reject &amp; restore</ns1:t>
+            </ns1:r>
+            <ns1:endParaRPr lang="en-AU" sz="941"/>
+          </ns1:p>
+        </ns0:txBody>
+      </ns0:sp>
+      <ns0:sp>
+        <ns0:nvSpPr>
+          <ns0:cNvPr id="99" name="previous-scenario"/>
+          <ns0:cNvSpPr/>
+          <ns0:nvPr/>
+        </ns0:nvSpPr>
+        <ns0:spPr>
+          <ns1:xfrm>
+            <ns1:off x="11502543" y="5446535"/>
+            <ns1:ext cx="328574" cy="343510"/>
+          </ns1:xfrm>
+          <ns1:prstGeom prst="roundRect">
+            <ns1:avLst>
+              <ns1:gd name="adj" fmla="val 15909"/>
+            </ns1:avLst>
+          </ns1:prstGeom>
+          <ns1:noFill/>
+          <ns1:ln w="7468" cap="flat">
+            <ns1:solidFill>
+              <ns1:srgbClr val="D2D3C8">
+                <ns1:alpha val="30000"/>
+              </ns1:srgbClr>
+            </ns1:solidFill>
+            <ns1:round/>
+          </ns1:ln>
+        </ns0:spPr>
+      </ns0:sp>
+      <ns0:sp>
+        <ns0:nvSpPr>
+          <ns0:cNvPr id="100" name="path"/>
+          <ns0:cNvSpPr/>
+          <ns0:nvPr/>
+        </ns0:nvSpPr>
+        <ns0:spPr>
+          <ns1:xfrm>
+            <ns1:off x="11618913" y="5590909"/>
+            <ns1:ext cx="95834" cy="47917"/>
+          </ns1:xfrm>
+          <ns1:custGeom>
+            <ns1:avLst/>
+            <ns1:gdLst/>
+            <ns1:ahLst/>
+            <ns1:cxnLst/>
+            <ns1:rect l="0" t="0" r="r" b="b"/>
+            <ns1:pathLst>
+              <ns1:path w="12577" h="6288" fill="none" stroke="1" extrusionOk="0">
+                <ns1:moveTo>
+                  <ns1:pt x="0" y="6288"/>
+                </ns1:moveTo>
+                <ns1:lnTo>
+                  <ns1:pt x="6288" y="0"/>
+                </ns1:lnTo>
+                <ns1:lnTo>
+                  <ns1:pt x="12577" y="6288"/>
+                </ns1:lnTo>
+              </ns1:path>
+            </ns1:pathLst>
+          </ns1:custGeom>
+          <ns1:noFill/>
+          <ns1:ln w="12322" cap="flat">
+            <ns1:solidFill>
+              <ns1:srgbClr val="20231F">
+                <ns1:alpha val="30000"/>
+              </ns1:srgbClr>
+            </ns1:solidFill>
+            <ns1:round/>
+          </ns1:ln>
+        </ns0:spPr>
+      </ns0:sp>
+      <ns0:sp>
+        <ns0:nvSpPr>
+          <ns0:cNvPr id="101" name="next-scenario"/>
+          <ns0:cNvSpPr/>
+          <ns0:nvPr/>
+        </ns0:nvSpPr>
+        <ns0:spPr>
+          <ns1:xfrm>
+            <ns1:off x="11502543" y="5864721"/>
+            <ns1:ext cx="328574" cy="343510"/>
+          </ns1:xfrm>
+          <ns1:prstGeom prst="roundRect">
+            <ns1:avLst>
+              <ns1:gd name="adj" fmla="val 15909"/>
+            </ns1:avLst>
+          </ns1:prstGeom>
+          <ns1:noFill/>
+          <ns1:ln w="7468" cap="flat">
+            <ns1:solidFill>
+              <ns1:srgbClr val="D2D3C8"/>
+            </ns1:solidFill>
+            <ns1:round/>
+          </ns1:ln>
+        </ns0:spPr>
+      </ns0:sp>
+      <ns0:sp>
+        <ns0:nvSpPr>
+          <ns0:cNvPr id="102" name="path"/>
+          <ns0:cNvSpPr/>
+          <ns0:nvPr/>
+        </ns0:nvSpPr>
+        <ns0:spPr>
+          <ns1:xfrm>
+            <ns1:off x="11618913" y="6015940"/>
+            <ns1:ext cx="95834" cy="47917"/>
+          </ns1:xfrm>
+          <ns1:custGeom>
+            <ns1:avLst/>
+            <ns1:gdLst/>
+            <ns1:ahLst/>
+            <ns1:cxnLst/>
+            <ns1:rect l="0" t="0" r="r" b="b"/>
+            <ns1:pathLst>
+              <ns1:path w="12577" h="6288" fill="none" stroke="1" extrusionOk="0">
+                <ns1:moveTo>
+                  <ns1:pt x="0" y="0"/>
+                </ns1:moveTo>
+                <ns1:lnTo>
+                  <ns1:pt x="6288" y="6288"/>
+                </ns1:lnTo>
+                <ns1:lnTo>
+                  <ns1:pt x="12577" y="0"/>
+                </ns1:lnTo>
+              </ns1:path>
+            </ns1:pathLst>
+          </ns1:custGeom>
+          <ns1:noFill/>
+          <ns1:ln w="12322" cap="flat">
+            <ns1:solidFill>
+              <ns1:srgbClr val="20231F"/>
+            </ns1:solidFill>
+            <ns1:round/>
+          </ns1:ln>
+        </ns0:spPr>
+      </ns0:sp>
+      <ns0:sp>
+        <ns0:nvSpPr>
+          <ns0:cNvPr id="103" name="USB inserted marker"/>
+          <ns0:cNvSpPr/>
+          <ns0:nvPr/>
+        </ns0:nvSpPr>
+        <ns0:spPr>
+          <ns1:xfrm>
+            <ns1:off x="870439" y="4233962"/>
+            <ns1:ext cx="1237250" cy="349341"/>
+          </ns1:xfrm>
+          <ns1:prstGeom prst="roundRect">
+            <ns1:avLst>
+              <ns1:gd name="adj" fmla="val 16667"/>
+            </ns1:avLst>
+          </ns1:prstGeom>
+          <ns1:solidFill>
+            <ns1:srgbClr val="F8E7DF"/>
+          </ns1:solidFill>
+          <ns1:ln w="12192" cap="flat">
+            <ns1:solidFill>
+              <ns1:srgbClr val="C43E2D"/>
+            </ns1:solidFill>
+            <ns1:round/>
+          </ns1:ln>
+        </ns0:spPr>
+      </ns0:sp>
+      <ns0:sp>
+        <ns0:nvSpPr>
+          <ns0:cNvPr id="104" name="USB device icon"/>
+          <ns0:cNvSpPr/>
+          <ns0:nvPr/>
+        </ns0:nvSpPr>
+        <ns0:spPr>
+          <ns1:xfrm>
+            <ns1:off x="986886" y="4292186"/>
+            <ns1:ext cx="123725" cy="174671"/>
+          </ns1:xfrm>
+          <ns1:custGeom>
+            <ns1:avLst/>
+            <ns1:gdLst/>
+            <ns1:ahLst/>
+            <ns1:cxnLst/>
+            <ns1:rect l="0" t="0" r="r" b="b"/>
+            <ns1:pathLst>
+              <ns1:path w="16237" h="22923" fill="none" stroke="1" extrusionOk="0">
+                <ns1:moveTo>
+                  <ns1:pt x="0" y="6686"/>
+                </ns1:moveTo>
+                <ns1:lnTo>
+                  <ns1:pt x="16237" y="6686"/>
+                </ns1:lnTo>
+                <ns1:lnTo>
+                  <ns1:pt x="16237" y="22923"/>
+                </ns1:lnTo>
+                <ns1:lnTo>
+                  <ns1:pt x="0" y="22923"/>
+                </ns1:lnTo>
+                <ns1:close/>
+                <ns1:moveTo>
+                  <ns1:pt x="4776" y="6686"/>
+                </ns1:moveTo>
+                <ns1:lnTo>
+                  <ns1:pt x="4776" y="0"/>
+                </ns1:lnTo>
+                <ns1:lnTo>
+                  <ns1:pt x="11461" y="0"/>
+                </ns1:lnTo>
+                <ns1:lnTo>
+                  <ns1:pt x="11461" y="6686"/>
+                </ns1:lnTo>
+              </ns1:path>
+            </ns1:pathLst>
+          </ns1:custGeom>
+          <ns1:noFill/>
+          <ns1:ln w="12192" cap="rnd">
+            <ns1:solidFill>
+              <ns1:srgbClr val="C43E2D"/>
+            </ns1:solidFill>
+            <ns1:round/>
+          </ns1:ln>
+        </ns0:spPr>
+      </ns0:sp>
+      <ns0:sp>
+        <ns0:nvSpPr>
+          <ns0:cNvPr id="105" name="USB added"/>
+          <ns0:cNvSpPr txBox="1"/>
+          <ns0:nvPr/>
+        </ns0:nvSpPr>
+        <ns0:spPr>
+          <ns1:xfrm>
+            <ns1:off x="1183391" y="4330039"/>
+            <ns1:ext cx="899160" cy="228600"/>
+          </ns1:xfrm>
+          <ns1:prstGeom prst="rect">
+            <ns1:avLst/>
+          </ns1:prstGeom>
+          <ns1:noFill/>
+          <ns1:ln w="7620" cap="flat">
+            <ns1:noFill/>
+            <ns1:round/>
+          </ns1:ln>
+        </ns0:spPr>
+        <ns0:txBody>
+          <ns1:bodyPr wrap="none" lIns="0" rIns="0" tIns="0" bIns="0" anchor="t" rtlCol="0">
+            <ns1:noAutofit/>
+          </ns1:bodyPr>
+          <ns1:lstStyle/>
+          <ns1:p>
+            <ns1:pPr marL="0" indent="0" algn="l" fontAlgn="base">
+              <ns1:lnSpc>
+                <ns1:spcPts val="974"/>
+              </ns1:lnSpc>
+              <ns1:spcBef>
+                <ns1:spcPts val="0"/>
+              </ns1:spcBef>
+              <ns1:spcAft>
+                <ns1:spcPts val="0"/>
+              </ns1:spcAft>
+              <ns1:buNone/>
+            </ns1:pPr>
+            <ns1:r>
+              <ns1:rPr lang="en-AU" sz="974" b="0" spc="0" dirty="0">
+                <ns1:solidFill>
+                  <ns1:srgbClr val="C43E2D"/>
+                </ns1:solidFill>
+                <ns1:latin typeface="Space Grotesk"/>
+                <ns1:ea typeface="Space Grotesk"/>
+                <ns1:cs typeface="Space Grotesk"/>
+              </ns1:rPr>
+              <ns1:t xml:space="preserve">USB added</ns1:t>
+            </ns1:r>
+            <ns1:endParaRPr lang="en-AU" sz="974"/>
+          </ns1:p>
+        </ns0:txBody>
+      </ns0:sp>
+    </ns0:spTree>
+  </ns0:cSld>
+  <ns0:clrMapOvr>
+    <ns1:masterClrMapping/>
+  </ns0:clrMapOvr>
+</ns0:sld>
 </file>
 
 <file path=ppt/slides/slide2.xml><?xml version="1.0" encoding="utf-8"?>
